--- a/10moSemestre/TdP2/E1-PlanProyecto/A4 Plan de Proyecto.pptx
+++ b/10moSemestre/TdP2/E1-PlanProyecto/A4 Plan de Proyecto.pptx
@@ -5,7 +5,7 @@
     <p:sldMasterId id="2147483686" r:id="rId4"/>
   </p:sldMasterIdLst>
   <p:notesMasterIdLst>
-    <p:notesMasterId r:id="rId17"/>
+    <p:notesMasterId r:id="rId18"/>
   </p:notesMasterIdLst>
   <p:sldIdLst>
     <p:sldId id="256" r:id="rId5"/>
@@ -15,11 +15,12 @@
     <p:sldId id="262" r:id="rId9"/>
     <p:sldId id="259" r:id="rId10"/>
     <p:sldId id="267" r:id="rId11"/>
-    <p:sldId id="268" r:id="rId12"/>
-    <p:sldId id="263" r:id="rId13"/>
-    <p:sldId id="265" r:id="rId14"/>
-    <p:sldId id="264" r:id="rId15"/>
-    <p:sldId id="266" r:id="rId16"/>
+    <p:sldId id="269" r:id="rId12"/>
+    <p:sldId id="270" r:id="rId13"/>
+    <p:sldId id="263" r:id="rId14"/>
+    <p:sldId id="265" r:id="rId15"/>
+    <p:sldId id="264" r:id="rId16"/>
+    <p:sldId id="266" r:id="rId17"/>
   </p:sldIdLst>
   <p:sldSz cx="12192000" cy="6858000"/>
   <p:notesSz cx="6858000" cy="9144000"/>
@@ -124,15 +125,6 @@
     </p:ext>
   </p:extLst>
 </p:presentation>
-</file>
-
-<file path=ppt/revisionInfo.xml><?xml version="1.0" encoding="utf-8"?>
-<p1510:revInfo xmlns:a="http://schemas.openxmlformats.org/drawingml/2006/main" xmlns:r="http://schemas.openxmlformats.org/officeDocument/2006/relationships" xmlns:p1510="http://schemas.microsoft.com/office/powerpoint/2015/10/main">
-  <p1510:revLst>
-    <p1510:client id="{1806FAB4-5128-4B4A-89BF-EC674B5495A3}" v="60" dt="2025-09-12T21:46:24.439"/>
-    <p1510:client id="{8C619041-95FE-4312-BC0E-E25939E4A7F2}" v="2" dt="2025-09-12T15:32:11.559"/>
-  </p1510:revLst>
-</p1510:revInfo>
 </file>
 
 <file path=ppt/diagrams/colors1.xml><?xml version="1.0" encoding="utf-8"?>
@@ -1968,10 +1960,10 @@
             <a:defRPr cap="all"/>
           </a:pPr>
           <a:r>
-            <a:rPr lang="es-ES"/>
-            <a:t>Reflejar cada gesto en una acción específica del autito.</a:t>
+            <a:rPr lang="es-ES" dirty="0"/>
+            <a:t>Reflejar cada gesto en una acción específica del auto.</a:t>
           </a:r>
-          <a:endParaRPr lang="en-US"/>
+          <a:endParaRPr lang="en-US" dirty="0"/>
         </a:p>
       </dgm:t>
     </dgm:pt>
@@ -2409,7 +2401,7 @@
       </dgm:spPr>
       <dgm:extLst>
         <a:ext uri="{E40237B7-FDA0-4F09-8148-C483321AD2D9}">
-          <dgm14:cNvPr xmlns:dgm14="http://schemas.microsoft.com/office/drawing/2010/diagram" id="0" name="" descr="Robot con relleno sólido"/>
+          <dgm14:cNvPr xmlns:dgm14="http://schemas.microsoft.com/office/drawing/2010/diagram" id="0" name="" descr="Taxi con relleno sólido"/>
         </a:ext>
       </dgm:extLst>
     </dgm:pt>
@@ -2583,10 +2575,10 @@
         <a:lstStyle/>
         <a:p>
           <a:r>
-            <a:rPr lang="es-ES" b="0" i="0"/>
-            <a:t>Visualización en tiempo real de la cantidad de FPS alcanzados.</a:t>
+            <a:rPr lang="es-ES" b="0" i="0" dirty="0"/>
+            <a:t>Visualización de la cantidad de FPS alcanzados.</a:t>
           </a:r>
-          <a:endParaRPr lang="en-US"/>
+          <a:endParaRPr lang="en-US" dirty="0"/>
         </a:p>
       </dgm:t>
     </dgm:pt>
@@ -4101,10 +4093,10 @@
             <a:defRPr cap="all"/>
           </a:pPr>
           <a:r>
-            <a:rPr lang="es-ES" sz="1100" kern="1200"/>
-            <a:t>Reflejar cada gesto en una acción específica del autito.</a:t>
+            <a:rPr lang="es-ES" sz="1100" kern="1200" dirty="0"/>
+            <a:t>Reflejar cada gesto en una acción específica del auto.</a:t>
           </a:r>
-          <a:endParaRPr lang="en-US" sz="1100" kern="1200"/>
+          <a:endParaRPr lang="en-US" sz="1100" kern="1200" dirty="0"/>
         </a:p>
       </dsp:txBody>
       <dsp:txXfrm>
@@ -4568,10 +4560,10 @@
             <a:buNone/>
           </a:pPr>
           <a:r>
-            <a:rPr lang="es-ES" sz="1600" b="0" i="0" kern="1200"/>
-            <a:t>Visualización en tiempo real de la cantidad de FPS alcanzados.</a:t>
+            <a:rPr lang="es-ES" sz="1600" b="0" i="0" kern="1200" dirty="0"/>
+            <a:t>Visualización de la cantidad de FPS alcanzados.</a:t>
           </a:r>
-          <a:endParaRPr lang="en-US" sz="1600" kern="1200"/>
+          <a:endParaRPr lang="en-US" sz="1600" kern="1200" dirty="0"/>
         </a:p>
       </dsp:txBody>
       <dsp:txXfrm>
@@ -7696,7 +7688,7 @@
           <a:p>
             <a:fld id="{85D751DF-6666-4A79-9BDB-90C9AAD2316C}" type="datetimeFigureOut">
               <a:rPr lang="es-AR" smtClean="0"/>
-              <a:t>11/9/2025</a:t>
+              <a:t>13/9/2025</a:t>
             </a:fld>
             <a:endParaRPr lang="es-AR"/>
           </a:p>
@@ -8285,7 +8277,7 @@
           <a:p>
             <a:fld id="{D1D1EADE-8E88-4C7C-8AC5-FB148DE4940E}" type="datetime1">
               <a:rPr lang="en-US" smtClean="0"/>
-              <a:t>9/11/2025</a:t>
+              <a:t>9/13/2025</a:t>
             </a:fld>
             <a:endParaRPr lang="en-US"/>
           </a:p>
@@ -8485,7 +8477,7 @@
           <a:p>
             <a:fld id="{EC3C8B9C-477D-492A-96AD-1FC2CC997A73}" type="datetime1">
               <a:rPr lang="en-US" smtClean="0"/>
-              <a:t>9/11/2025</a:t>
+              <a:t>9/13/2025</a:t>
             </a:fld>
             <a:endParaRPr lang="en-US"/>
           </a:p>
@@ -8695,7 +8687,7 @@
           <a:p>
             <a:fld id="{42D3AED5-E26D-4E29-B1B3-7847B6779594}" type="datetime1">
               <a:rPr lang="en-US" smtClean="0"/>
-              <a:t>9/11/2025</a:t>
+              <a:t>9/13/2025</a:t>
             </a:fld>
             <a:endParaRPr lang="en-US"/>
           </a:p>
@@ -8895,7 +8887,7 @@
           <a:p>
             <a:fld id="{157B6794-849E-4626-908B-D15793550EFB}" type="datetime1">
               <a:rPr lang="en-US" smtClean="0"/>
-              <a:t>9/11/2025</a:t>
+              <a:t>9/13/2025</a:t>
             </a:fld>
             <a:endParaRPr lang="en-US"/>
           </a:p>
@@ -9171,7 +9163,7 @@
           <a:p>
             <a:fld id="{63DB64E7-5594-42A3-ADBF-E95A7ACEAD64}" type="datetime1">
               <a:rPr lang="en-US" smtClean="0"/>
-              <a:t>9/11/2025</a:t>
+              <a:t>9/13/2025</a:t>
             </a:fld>
             <a:endParaRPr lang="en-US"/>
           </a:p>
@@ -9444,7 +9436,7 @@
           <a:p>
             <a:fld id="{18462B0B-D248-4FFB-8695-AD7FA4B1284A}" type="datetime1">
               <a:rPr lang="en-US" smtClean="0"/>
-              <a:t>9/11/2025</a:t>
+              <a:t>9/13/2025</a:t>
             </a:fld>
             <a:endParaRPr lang="en-US"/>
           </a:p>
@@ -9867,7 +9859,7 @@
           <a:p>
             <a:fld id="{D0378EFB-9159-4510-B73F-4F0409ADE937}" type="datetime1">
               <a:rPr lang="en-US" smtClean="0"/>
-              <a:t>9/11/2025</a:t>
+              <a:t>9/13/2025</a:t>
             </a:fld>
             <a:endParaRPr lang="en-US"/>
           </a:p>
@@ -10009,7 +10001,7 @@
           <a:p>
             <a:fld id="{89BC9412-2452-4BED-A324-9D8C115361AD}" type="datetime1">
               <a:rPr lang="en-US" smtClean="0"/>
-              <a:t>9/11/2025</a:t>
+              <a:t>9/13/2025</a:t>
             </a:fld>
             <a:endParaRPr lang="en-US"/>
           </a:p>
@@ -10122,7 +10114,7 @@
           <a:p>
             <a:fld id="{F5318F62-D251-40E8-A23C-F4CFE9FEAB41}" type="datetime1">
               <a:rPr lang="en-US" smtClean="0"/>
-              <a:t>9/11/2025</a:t>
+              <a:t>9/13/2025</a:t>
             </a:fld>
             <a:endParaRPr lang="en-US"/>
           </a:p>
@@ -10435,7 +10427,7 @@
           <a:p>
             <a:fld id="{44F76144-149E-4874-93A5-554A0357CF82}" type="datetime1">
               <a:rPr lang="en-US" smtClean="0"/>
-              <a:t>9/11/2025</a:t>
+              <a:t>9/13/2025</a:t>
             </a:fld>
             <a:endParaRPr lang="en-US"/>
           </a:p>
@@ -10728,7 +10720,7 @@
           <a:p>
             <a:fld id="{50BA65D8-0540-4835-AE5C-25D29DBA01BE}" type="datetime1">
               <a:rPr lang="en-US" smtClean="0"/>
-              <a:t>9/11/2025</a:t>
+              <a:t>9/13/2025</a:t>
             </a:fld>
             <a:endParaRPr lang="en-US"/>
           </a:p>
@@ -10970,7 +10962,7 @@
           <a:p>
             <a:fld id="{E31BA835-12AC-4E8F-955A-EA3F4DE2791F}" type="datetime1">
               <a:rPr lang="en-US" smtClean="0"/>
-              <a:t>9/11/2025</a:t>
+              <a:t>9/13/2025</a:t>
             </a:fld>
             <a:endParaRPr lang="en-US"/>
           </a:p>
@@ -11942,6 +11934,468 @@
           <a:chExt cx="0" cy="0"/>
         </a:xfrm>
       </p:grpSpPr>
+      <p:cxnSp>
+        <p:nvCxnSpPr>
+          <p:cNvPr id="18" name="Straight Connector 8">
+            <a:extLst>
+              <a:ext uri="{FF2B5EF4-FFF2-40B4-BE49-F238E27FC236}">
+                <a16:creationId xmlns:a16="http://schemas.microsoft.com/office/drawing/2014/main" id="{F64F9B95-9045-48D2-B9F3-2927E98F54AA}"/>
+              </a:ext>
+              <a:ext uri="{C183D7F6-B498-43B3-948B-1728B52AA6E4}">
+                <adec:decorative xmlns:adec="http://schemas.microsoft.com/office/drawing/2017/decorative" val="1"/>
+              </a:ext>
+            </a:extLst>
+          </p:cNvPr>
+          <p:cNvCxnSpPr>
+            <a:cxnSpLocks noGrp="1" noRot="1" noChangeAspect="1" noMove="1" noResize="1" noEditPoints="1" noAdjustHandles="1" noChangeArrowheads="1" noChangeShapeType="1"/>
+          </p:cNvCxnSpPr>
+          <p:nvPr>
+            <p:extLst>
+              <p:ext uri="{386F3935-93C4-4BCD-93E2-E3B085C9AB24}">
+                <p16:designElem xmlns:p16="http://schemas.microsoft.com/office/powerpoint/2015/main" val="1"/>
+              </p:ext>
+            </p:extLst>
+          </p:nvPr>
+        </p:nvCxnSpPr>
+        <p:spPr>
+          <a:xfrm>
+            <a:off x="800100" y="723900"/>
+            <a:ext cx="10591800" cy="0"/>
+          </a:xfrm>
+          <a:prstGeom prst="line">
+            <a:avLst/>
+          </a:prstGeom>
+          <a:ln w="44450">
+            <a:solidFill>
+              <a:schemeClr val="tx1"/>
+            </a:solidFill>
+          </a:ln>
+        </p:spPr>
+        <p:style>
+          <a:lnRef idx="1">
+            <a:schemeClr val="accent1"/>
+          </a:lnRef>
+          <a:fillRef idx="0">
+            <a:schemeClr val="accent1"/>
+          </a:fillRef>
+          <a:effectRef idx="0">
+            <a:schemeClr val="accent1"/>
+          </a:effectRef>
+          <a:fontRef idx="minor">
+            <a:schemeClr val="tx1"/>
+          </a:fontRef>
+        </p:style>
+      </p:cxnSp>
+      <p:cxnSp>
+        <p:nvCxnSpPr>
+          <p:cNvPr id="19" name="Straight Connector 10">
+            <a:extLst>
+              <a:ext uri="{FF2B5EF4-FFF2-40B4-BE49-F238E27FC236}">
+                <a16:creationId xmlns:a16="http://schemas.microsoft.com/office/drawing/2014/main" id="{085AA86F-6A4D-4BCB-A045-D992CDC2959B}"/>
+              </a:ext>
+              <a:ext uri="{C183D7F6-B498-43B3-948B-1728B52AA6E4}">
+                <adec:decorative xmlns:adec="http://schemas.microsoft.com/office/drawing/2017/decorative" val="1"/>
+              </a:ext>
+            </a:extLst>
+          </p:cNvPr>
+          <p:cNvCxnSpPr>
+            <a:cxnSpLocks noGrp="1" noRot="1" noChangeAspect="1" noMove="1" noResize="1" noEditPoints="1" noAdjustHandles="1" noChangeArrowheads="1" noChangeShapeType="1"/>
+          </p:cNvCxnSpPr>
+          <p:nvPr>
+            <p:extLst>
+              <p:ext uri="{386F3935-93C4-4BCD-93E2-E3B085C9AB24}">
+                <p16:designElem xmlns:p16="http://schemas.microsoft.com/office/powerpoint/2015/main" val="1"/>
+              </p:ext>
+            </p:extLst>
+          </p:nvPr>
+        </p:nvCxnSpPr>
+        <p:spPr>
+          <a:xfrm>
+            <a:off x="800100" y="6142781"/>
+            <a:ext cx="10591800" cy="0"/>
+          </a:xfrm>
+          <a:prstGeom prst="line">
+            <a:avLst/>
+          </a:prstGeom>
+          <a:ln w="12700">
+            <a:solidFill>
+              <a:schemeClr val="tx1"/>
+            </a:solidFill>
+          </a:ln>
+        </p:spPr>
+        <p:style>
+          <a:lnRef idx="1">
+            <a:schemeClr val="accent1"/>
+          </a:lnRef>
+          <a:fillRef idx="0">
+            <a:schemeClr val="accent1"/>
+          </a:fillRef>
+          <a:effectRef idx="0">
+            <a:schemeClr val="accent1"/>
+          </a:effectRef>
+          <a:fontRef idx="minor">
+            <a:schemeClr val="tx1"/>
+          </a:fontRef>
+        </p:style>
+      </p:cxnSp>
+      <p:sp useBgFill="1">
+        <p:nvSpPr>
+          <p:cNvPr id="20" name="Rectangle 12">
+            <a:extLst>
+              <a:ext uri="{FF2B5EF4-FFF2-40B4-BE49-F238E27FC236}">
+                <a16:creationId xmlns:a16="http://schemas.microsoft.com/office/drawing/2014/main" id="{33E93247-6229-44AB-A550-739E971E690B}"/>
+              </a:ext>
+              <a:ext uri="{C183D7F6-B498-43B3-948B-1728B52AA6E4}">
+                <adec:decorative xmlns:adec="http://schemas.microsoft.com/office/drawing/2017/decorative" val="1"/>
+              </a:ext>
+            </a:extLst>
+          </p:cNvPr>
+          <p:cNvSpPr>
+            <a:spLocks noGrp="1" noRot="1" noChangeAspect="1" noMove="1" noResize="1" noEditPoints="1" noAdjustHandles="1" noChangeArrowheads="1" noChangeShapeType="1" noTextEdit="1"/>
+          </p:cNvSpPr>
+          <p:nvPr>
+            <p:extLst>
+              <p:ext uri="{386F3935-93C4-4BCD-93E2-E3B085C9AB24}">
+                <p16:designElem xmlns:p16="http://schemas.microsoft.com/office/powerpoint/2015/main" val="1"/>
+              </p:ext>
+            </p:extLst>
+          </p:nvPr>
+        </p:nvSpPr>
+        <p:spPr>
+          <a:xfrm>
+            <a:off x="0" y="0"/>
+            <a:ext cx="12192000" cy="6858000"/>
+          </a:xfrm>
+          <a:prstGeom prst="rect">
+            <a:avLst/>
+          </a:prstGeom>
+          <a:ln w="12700" cap="flat" cmpd="sng" algn="ctr">
+            <a:noFill/>
+            <a:prstDash val="solid"/>
+            <a:miter lim="800000"/>
+          </a:ln>
+          <a:effectLst/>
+          <a:extLst>
+            <a:ext uri="{91240B29-F687-4F45-9708-019B960494DF}">
+              <a14:hiddenLine xmlns:a14="http://schemas.microsoft.com/office/drawing/2010/main" w="12700" cap="flat" cmpd="sng" algn="ctr">
+                <a:solidFill>
+                  <a:schemeClr val="accent1">
+                    <a:shade val="50000"/>
+                  </a:schemeClr>
+                </a:solidFill>
+                <a:prstDash val="solid"/>
+                <a:miter lim="800000"/>
+              </a14:hiddenLine>
+            </a:ext>
+          </a:extLst>
+        </p:spPr>
+        <p:style>
+          <a:lnRef idx="2">
+            <a:schemeClr val="accent1">
+              <a:shade val="50000"/>
+            </a:schemeClr>
+          </a:lnRef>
+          <a:fillRef idx="1">
+            <a:schemeClr val="accent1"/>
+          </a:fillRef>
+          <a:effectRef idx="0">
+            <a:schemeClr val="accent1"/>
+          </a:effectRef>
+          <a:fontRef idx="minor">
+            <a:schemeClr val="lt1"/>
+          </a:fontRef>
+        </p:style>
+        <p:txBody>
+          <a:bodyPr rtlCol="0" anchor="ctr"/>
+          <a:lstStyle/>
+          <a:p>
+            <a:pPr algn="ctr"/>
+            <a:endParaRPr lang="en-US"/>
+          </a:p>
+        </p:txBody>
+      </p:sp>
+      <p:sp>
+        <p:nvSpPr>
+          <p:cNvPr id="2" name="Título 1">
+            <a:extLst>
+              <a:ext uri="{FF2B5EF4-FFF2-40B4-BE49-F238E27FC236}">
+                <a16:creationId xmlns:a16="http://schemas.microsoft.com/office/drawing/2014/main" id="{5ECAB0DF-2F44-A5AF-110E-7C8C99EA2C91}"/>
+              </a:ext>
+            </a:extLst>
+          </p:cNvPr>
+          <p:cNvSpPr>
+            <a:spLocks noGrp="1"/>
+          </p:cNvSpPr>
+          <p:nvPr>
+            <p:ph type="title"/>
+          </p:nvPr>
+        </p:nvSpPr>
+        <p:spPr>
+          <a:xfrm>
+            <a:off x="8176648" y="1447801"/>
+            <a:ext cx="2877774" cy="1461010"/>
+          </a:xfrm>
+        </p:spPr>
+        <p:txBody>
+          <a:bodyPr vert="horz" lIns="91440" tIns="45720" rIns="91440" bIns="45720" rtlCol="0" anchor="t">
+            <a:normAutofit fontScale="90000"/>
+          </a:bodyPr>
+          <a:lstStyle/>
+          <a:p>
+            <a:r>
+              <a:rPr lang="en-US" sz="4200" dirty="0"/>
+              <a:t>DIAGRAMA DE SOFTWARE</a:t>
+            </a:r>
+          </a:p>
+        </p:txBody>
+      </p:sp>
+      <p:cxnSp>
+        <p:nvCxnSpPr>
+          <p:cNvPr id="21" name="Straight Connector 14">
+            <a:extLst>
+              <a:ext uri="{FF2B5EF4-FFF2-40B4-BE49-F238E27FC236}">
+                <a16:creationId xmlns:a16="http://schemas.microsoft.com/office/drawing/2014/main" id="{EE2E603F-4A95-4FE8-BB06-211DFD75DBEF}"/>
+              </a:ext>
+              <a:ext uri="{C183D7F6-B498-43B3-948B-1728B52AA6E4}">
+                <adec:decorative xmlns:adec="http://schemas.microsoft.com/office/drawing/2017/decorative" val="1"/>
+              </a:ext>
+            </a:extLst>
+          </p:cNvPr>
+          <p:cNvCxnSpPr>
+            <a:cxnSpLocks noGrp="1" noRot="1" noChangeAspect="1" noMove="1" noResize="1" noEditPoints="1" noAdjustHandles="1" noChangeArrowheads="1" noChangeShapeType="1"/>
+          </p:cNvCxnSpPr>
+          <p:nvPr>
+            <p:extLst>
+              <p:ext uri="{386F3935-93C4-4BCD-93E2-E3B085C9AB24}">
+                <p16:designElem xmlns:p16="http://schemas.microsoft.com/office/powerpoint/2015/main" val="1"/>
+              </p:ext>
+            </p:extLst>
+          </p:nvPr>
+        </p:nvCxnSpPr>
+        <p:spPr>
+          <a:xfrm>
+            <a:off x="800100" y="723900"/>
+            <a:ext cx="10591800" cy="0"/>
+          </a:xfrm>
+          <a:prstGeom prst="line">
+            <a:avLst/>
+          </a:prstGeom>
+          <a:ln w="44450">
+            <a:solidFill>
+              <a:schemeClr val="tx1"/>
+            </a:solidFill>
+          </a:ln>
+        </p:spPr>
+        <p:style>
+          <a:lnRef idx="1">
+            <a:schemeClr val="accent1"/>
+          </a:lnRef>
+          <a:fillRef idx="0">
+            <a:schemeClr val="accent1"/>
+          </a:fillRef>
+          <a:effectRef idx="0">
+            <a:schemeClr val="accent1"/>
+          </a:effectRef>
+          <a:fontRef idx="minor">
+            <a:schemeClr val="tx1"/>
+          </a:fontRef>
+        </p:style>
+      </p:cxnSp>
+      <p:pic>
+        <p:nvPicPr>
+          <p:cNvPr id="4" name="Imagen 3" descr="Diagrama&#10;&#10;El contenido generado por IA puede ser incorrecto.">
+            <a:extLst>
+              <a:ext uri="{FF2B5EF4-FFF2-40B4-BE49-F238E27FC236}">
+                <a16:creationId xmlns:a16="http://schemas.microsoft.com/office/drawing/2014/main" id="{03371F8A-3A1A-608E-8F30-BD9B7E7A4902}"/>
+              </a:ext>
+            </a:extLst>
+          </p:cNvPr>
+          <p:cNvPicPr>
+            <a:picLocks noChangeAspect="1"/>
+          </p:cNvPicPr>
+          <p:nvPr/>
+        </p:nvPicPr>
+        <p:blipFill>
+          <a:blip r:embed="rId2">
+            <a:extLst>
+              <a:ext uri="{28A0092B-C50C-407E-A947-70E740481C1C}">
+                <a14:useLocalDpi xmlns:a14="http://schemas.microsoft.com/office/drawing/2010/main" val="0"/>
+              </a:ext>
+            </a:extLst>
+          </a:blip>
+          <a:srcRect l="6136" t="11099" r="5985" b="11155"/>
+          <a:stretch>
+            <a:fillRect/>
+          </a:stretch>
+        </p:blipFill>
+        <p:spPr>
+          <a:xfrm>
+            <a:off x="699111" y="1777853"/>
+            <a:ext cx="7179970" cy="3303079"/>
+          </a:xfrm>
+          <a:prstGeom prst="rect">
+            <a:avLst/>
+          </a:prstGeom>
+        </p:spPr>
+      </p:pic>
+      <p:cxnSp>
+        <p:nvCxnSpPr>
+          <p:cNvPr id="17" name="Straight Connector 16">
+            <a:extLst>
+              <a:ext uri="{FF2B5EF4-FFF2-40B4-BE49-F238E27FC236}">
+                <a16:creationId xmlns:a16="http://schemas.microsoft.com/office/drawing/2014/main" id="{D7CC41EB-2D81-4303-9171-6401B388BA35}"/>
+              </a:ext>
+              <a:ext uri="{C183D7F6-B498-43B3-948B-1728B52AA6E4}">
+                <adec:decorative xmlns:adec="http://schemas.microsoft.com/office/drawing/2017/decorative" val="1"/>
+              </a:ext>
+            </a:extLst>
+          </p:cNvPr>
+          <p:cNvCxnSpPr>
+            <a:cxnSpLocks noGrp="1" noRot="1" noChangeAspect="1" noMove="1" noResize="1" noEditPoints="1" noAdjustHandles="1" noChangeArrowheads="1" noChangeShapeType="1"/>
+          </p:cNvCxnSpPr>
+          <p:nvPr>
+            <p:extLst>
+              <p:ext uri="{386F3935-93C4-4BCD-93E2-E3B085C9AB24}">
+                <p16:designElem xmlns:p16="http://schemas.microsoft.com/office/powerpoint/2015/main" val="1"/>
+              </p:ext>
+            </p:extLst>
+          </p:nvPr>
+        </p:nvCxnSpPr>
+        <p:spPr>
+          <a:xfrm>
+            <a:off x="800100" y="6134885"/>
+            <a:ext cx="10591800" cy="0"/>
+          </a:xfrm>
+          <a:prstGeom prst="line">
+            <a:avLst/>
+          </a:prstGeom>
+          <a:ln w="12700">
+            <a:solidFill>
+              <a:schemeClr val="tx1"/>
+            </a:solidFill>
+          </a:ln>
+        </p:spPr>
+        <p:style>
+          <a:lnRef idx="1">
+            <a:schemeClr val="accent1"/>
+          </a:lnRef>
+          <a:fillRef idx="0">
+            <a:schemeClr val="accent1"/>
+          </a:fillRef>
+          <a:effectRef idx="0">
+            <a:schemeClr val="accent1"/>
+          </a:effectRef>
+          <a:fontRef idx="minor">
+            <a:schemeClr val="tx1"/>
+          </a:fontRef>
+        </p:style>
+      </p:cxnSp>
+      <p:sp>
+        <p:nvSpPr>
+          <p:cNvPr id="3" name="CuadroTexto 2">
+            <a:extLst>
+              <a:ext uri="{FF2B5EF4-FFF2-40B4-BE49-F238E27FC236}">
+                <a16:creationId xmlns:a16="http://schemas.microsoft.com/office/drawing/2014/main" id="{7FC8ED39-EBD4-4801-840C-1AF5CFE4A7A0}"/>
+              </a:ext>
+            </a:extLst>
+          </p:cNvPr>
+          <p:cNvSpPr txBox="1"/>
+          <p:nvPr/>
+        </p:nvSpPr>
+        <p:spPr>
+          <a:xfrm>
+            <a:off x="8176648" y="3603604"/>
+            <a:ext cx="2800764" cy="1477328"/>
+          </a:xfrm>
+          <a:prstGeom prst="rect">
+            <a:avLst/>
+          </a:prstGeom>
+          <a:noFill/>
+        </p:spPr>
+        <p:txBody>
+          <a:bodyPr wrap="square" rtlCol="0">
+            <a:spAutoFit/>
+          </a:bodyPr>
+          <a:lstStyle/>
+          <a:p>
+            <a:pPr marL="285750" indent="-285750">
+              <a:buFontTx/>
+              <a:buChar char="-"/>
+            </a:pPr>
+            <a:r>
+              <a:rPr lang="es-ES" dirty="0"/>
+              <a:t>Protocolo SCCB (variante de I</a:t>
+            </a:r>
+            <a:r>
+              <a:rPr lang="es-ES" baseline="30000" dirty="0"/>
+              <a:t>2</a:t>
+            </a:r>
+            <a:r>
+              <a:rPr lang="es-ES" dirty="0"/>
+              <a:t>C)</a:t>
+            </a:r>
+          </a:p>
+          <a:p>
+            <a:pPr marL="285750" indent="-285750">
+              <a:buFontTx/>
+              <a:buChar char="-"/>
+            </a:pPr>
+            <a:r>
+              <a:rPr lang="es-ES" dirty="0"/>
+              <a:t>Protocolo IEEE 802.11 (Wifi)</a:t>
+            </a:r>
+          </a:p>
+          <a:p>
+            <a:pPr marL="285750" indent="-285750">
+              <a:buFontTx/>
+              <a:buChar char="-"/>
+            </a:pPr>
+            <a:r>
+              <a:rPr lang="es-ES" dirty="0"/>
+              <a:t>Protocolo HTTP</a:t>
+            </a:r>
+            <a:endParaRPr lang="es-AR" dirty="0"/>
+          </a:p>
+        </p:txBody>
+      </p:sp>
+    </p:spTree>
+    <p:extLst>
+      <p:ext uri="{BB962C8B-B14F-4D97-AF65-F5344CB8AC3E}">
+        <p14:creationId xmlns:p14="http://schemas.microsoft.com/office/powerpoint/2010/main" val="2841916188"/>
+      </p:ext>
+    </p:extLst>
+  </p:cSld>
+  <p:clrMapOvr>
+    <a:masterClrMapping/>
+  </p:clrMapOvr>
+</p:sld>
+</file>
+
+<file path=ppt/slides/slide11.xml><?xml version="1.0" encoding="utf-8"?>
+<p:sld xmlns:a="http://schemas.openxmlformats.org/drawingml/2006/main" xmlns:r="http://schemas.openxmlformats.org/officeDocument/2006/relationships" xmlns:p="http://schemas.openxmlformats.org/presentationml/2006/main">
+  <p:cSld>
+    <p:bg>
+      <p:bgPr>
+        <a:solidFill>
+          <a:schemeClr val="bg1"/>
+        </a:solidFill>
+        <a:effectLst/>
+      </p:bgPr>
+    </p:bg>
+    <p:spTree>
+      <p:nvGrpSpPr>
+        <p:cNvPr id="1" name=""/>
+        <p:cNvGrpSpPr/>
+        <p:nvPr/>
+      </p:nvGrpSpPr>
+      <p:grpSpPr>
+        <a:xfrm>
+          <a:off x="0" y="0"/>
+          <a:ext cx="0" cy="0"/>
+          <a:chOff x="0" y="0"/>
+          <a:chExt cx="0" cy="0"/>
+        </a:xfrm>
+      </p:grpSpPr>
       <p:sp useBgFill="1">
         <p:nvSpPr>
           <p:cNvPr id="24" name="Rectangle 23">
@@ -12126,7 +12580,7 @@
           <p:nvPr>
             <p:extLst>
               <p:ext uri="{D42A27DB-BD31-4B8C-83A1-F6EECF244321}">
-                <p14:modId xmlns:p14="http://schemas.microsoft.com/office/powerpoint/2010/main" val="613092094"/>
+                <p14:modId xmlns:p14="http://schemas.microsoft.com/office/powerpoint/2010/main" val="3292473724"/>
               </p:ext>
             </p:extLst>
           </p:nvPr>
@@ -12154,7 +12608,7 @@
 </p:sld>
 </file>
 
-<file path=ppt/slides/slide11.xml><?xml version="1.0" encoding="utf-8"?>
+<file path=ppt/slides/slide12.xml><?xml version="1.0" encoding="utf-8"?>
 <p:sld xmlns:a="http://schemas.openxmlformats.org/drawingml/2006/main" xmlns:r="http://schemas.openxmlformats.org/officeDocument/2006/relationships" xmlns:p="http://schemas.openxmlformats.org/presentationml/2006/main">
   <p:cSld>
     <p:spTree>
@@ -12274,7 +12728,7 @@
 </p:sld>
 </file>
 
-<file path=ppt/slides/slide12.xml><?xml version="1.0" encoding="utf-8"?>
+<file path=ppt/slides/slide13.xml><?xml version="1.0" encoding="utf-8"?>
 <p:sld xmlns:a="http://schemas.openxmlformats.org/drawingml/2006/main" xmlns:r="http://schemas.openxmlformats.org/officeDocument/2006/relationships" xmlns:p="http://schemas.openxmlformats.org/presentationml/2006/main">
   <p:cSld>
     <p:spTree>
@@ -12729,7 +13183,7 @@
           <p:nvPr>
             <p:extLst>
               <p:ext uri="{D42A27DB-BD31-4B8C-83A1-F6EECF244321}">
-                <p14:modId xmlns:p14="http://schemas.microsoft.com/office/powerpoint/2010/main" val="697966548"/>
+                <p14:modId xmlns:p14="http://schemas.microsoft.com/office/powerpoint/2010/main" val="384362120"/>
               </p:ext>
             </p:extLst>
           </p:nvPr>
@@ -17135,6 +17589,14 @@
 <file path=ppt/slides/slide6.xml><?xml version="1.0" encoding="utf-8"?>
 <p:sld xmlns:a="http://schemas.openxmlformats.org/drawingml/2006/main" xmlns:r="http://schemas.openxmlformats.org/officeDocument/2006/relationships" xmlns:p="http://schemas.openxmlformats.org/presentationml/2006/main">
   <p:cSld>
+    <p:bg>
+      <p:bgPr>
+        <a:solidFill>
+          <a:schemeClr val="bg1"/>
+        </a:solidFill>
+        <a:effectLst/>
+      </p:bgPr>
+    </p:bg>
     <p:spTree>
       <p:nvGrpSpPr>
         <p:cNvPr id="1" name=""/>
@@ -17149,6 +17611,186 @@
           <a:chExt cx="0" cy="0"/>
         </a:xfrm>
       </p:grpSpPr>
+      <p:cxnSp>
+        <p:nvCxnSpPr>
+          <p:cNvPr id="21" name="Straight Connector 20">
+            <a:extLst>
+              <a:ext uri="{FF2B5EF4-FFF2-40B4-BE49-F238E27FC236}">
+                <a16:creationId xmlns:a16="http://schemas.microsoft.com/office/drawing/2014/main" id="{F64F9B95-9045-48D2-B9F3-2927E98F54AA}"/>
+              </a:ext>
+              <a:ext uri="{C183D7F6-B498-43B3-948B-1728B52AA6E4}">
+                <adec:decorative xmlns:adec="http://schemas.microsoft.com/office/drawing/2017/decorative" val="1"/>
+              </a:ext>
+            </a:extLst>
+          </p:cNvPr>
+          <p:cNvCxnSpPr>
+            <a:cxnSpLocks noGrp="1" noRot="1" noChangeAspect="1" noMove="1" noResize="1" noEditPoints="1" noAdjustHandles="1" noChangeArrowheads="1" noChangeShapeType="1"/>
+          </p:cNvCxnSpPr>
+          <p:nvPr>
+            <p:extLst>
+              <p:ext uri="{386F3935-93C4-4BCD-93E2-E3B085C9AB24}">
+                <p16:designElem xmlns:p16="http://schemas.microsoft.com/office/powerpoint/2015/main" val="1"/>
+              </p:ext>
+            </p:extLst>
+          </p:nvPr>
+        </p:nvCxnSpPr>
+        <p:spPr>
+          <a:xfrm>
+            <a:off x="800100" y="723900"/>
+            <a:ext cx="10591800" cy="0"/>
+          </a:xfrm>
+          <a:prstGeom prst="line">
+            <a:avLst/>
+          </a:prstGeom>
+          <a:ln w="44450">
+            <a:solidFill>
+              <a:schemeClr val="tx1"/>
+            </a:solidFill>
+          </a:ln>
+        </p:spPr>
+        <p:style>
+          <a:lnRef idx="1">
+            <a:schemeClr val="accent1"/>
+          </a:lnRef>
+          <a:fillRef idx="0">
+            <a:schemeClr val="accent1"/>
+          </a:fillRef>
+          <a:effectRef idx="0">
+            <a:schemeClr val="accent1"/>
+          </a:effectRef>
+          <a:fontRef idx="minor">
+            <a:schemeClr val="tx1"/>
+          </a:fontRef>
+        </p:style>
+      </p:cxnSp>
+      <p:cxnSp>
+        <p:nvCxnSpPr>
+          <p:cNvPr id="23" name="Straight Connector 22">
+            <a:extLst>
+              <a:ext uri="{FF2B5EF4-FFF2-40B4-BE49-F238E27FC236}">
+                <a16:creationId xmlns:a16="http://schemas.microsoft.com/office/drawing/2014/main" id="{085AA86F-6A4D-4BCB-A045-D992CDC2959B}"/>
+              </a:ext>
+              <a:ext uri="{C183D7F6-B498-43B3-948B-1728B52AA6E4}">
+                <adec:decorative xmlns:adec="http://schemas.microsoft.com/office/drawing/2017/decorative" val="1"/>
+              </a:ext>
+            </a:extLst>
+          </p:cNvPr>
+          <p:cNvCxnSpPr>
+            <a:cxnSpLocks noGrp="1" noRot="1" noChangeAspect="1" noMove="1" noResize="1" noEditPoints="1" noAdjustHandles="1" noChangeArrowheads="1" noChangeShapeType="1"/>
+          </p:cNvCxnSpPr>
+          <p:nvPr>
+            <p:extLst>
+              <p:ext uri="{386F3935-93C4-4BCD-93E2-E3B085C9AB24}">
+                <p16:designElem xmlns:p16="http://schemas.microsoft.com/office/powerpoint/2015/main" val="1"/>
+              </p:ext>
+            </p:extLst>
+          </p:nvPr>
+        </p:nvCxnSpPr>
+        <p:spPr>
+          <a:xfrm>
+            <a:off x="800100" y="6142781"/>
+            <a:ext cx="10591800" cy="0"/>
+          </a:xfrm>
+          <a:prstGeom prst="line">
+            <a:avLst/>
+          </a:prstGeom>
+          <a:ln w="12700">
+            <a:solidFill>
+              <a:schemeClr val="tx1"/>
+            </a:solidFill>
+          </a:ln>
+        </p:spPr>
+        <p:style>
+          <a:lnRef idx="1">
+            <a:schemeClr val="accent1"/>
+          </a:lnRef>
+          <a:fillRef idx="0">
+            <a:schemeClr val="accent1"/>
+          </a:fillRef>
+          <a:effectRef idx="0">
+            <a:schemeClr val="accent1"/>
+          </a:effectRef>
+          <a:fontRef idx="minor">
+            <a:schemeClr val="tx1"/>
+          </a:fontRef>
+        </p:style>
+      </p:cxnSp>
+      <p:sp useBgFill="1">
+        <p:nvSpPr>
+          <p:cNvPr id="25" name="Rectangle 24">
+            <a:extLst>
+              <a:ext uri="{FF2B5EF4-FFF2-40B4-BE49-F238E27FC236}">
+                <a16:creationId xmlns:a16="http://schemas.microsoft.com/office/drawing/2014/main" id="{33E93247-6229-44AB-A550-739E971E690B}"/>
+              </a:ext>
+              <a:ext uri="{C183D7F6-B498-43B3-948B-1728B52AA6E4}">
+                <adec:decorative xmlns:adec="http://schemas.microsoft.com/office/drawing/2017/decorative" val="1"/>
+              </a:ext>
+            </a:extLst>
+          </p:cNvPr>
+          <p:cNvSpPr>
+            <a:spLocks noGrp="1" noRot="1" noChangeAspect="1" noMove="1" noResize="1" noEditPoints="1" noAdjustHandles="1" noChangeArrowheads="1" noChangeShapeType="1" noTextEdit="1"/>
+          </p:cNvSpPr>
+          <p:nvPr>
+            <p:extLst>
+              <p:ext uri="{386F3935-93C4-4BCD-93E2-E3B085C9AB24}">
+                <p16:designElem xmlns:p16="http://schemas.microsoft.com/office/powerpoint/2015/main" val="1"/>
+              </p:ext>
+            </p:extLst>
+          </p:nvPr>
+        </p:nvSpPr>
+        <p:spPr>
+          <a:xfrm>
+            <a:off x="0" y="0"/>
+            <a:ext cx="12192000" cy="6858000"/>
+          </a:xfrm>
+          <a:prstGeom prst="rect">
+            <a:avLst/>
+          </a:prstGeom>
+          <a:ln w="12700" cap="flat" cmpd="sng" algn="ctr">
+            <a:noFill/>
+            <a:prstDash val="solid"/>
+            <a:miter lim="800000"/>
+          </a:ln>
+          <a:effectLst/>
+          <a:extLst>
+            <a:ext uri="{91240B29-F687-4F45-9708-019B960494DF}">
+              <a14:hiddenLine xmlns:a14="http://schemas.microsoft.com/office/drawing/2010/main" w="12700" cap="flat" cmpd="sng" algn="ctr">
+                <a:solidFill>
+                  <a:schemeClr val="accent1">
+                    <a:shade val="50000"/>
+                  </a:schemeClr>
+                </a:solidFill>
+                <a:prstDash val="solid"/>
+                <a:miter lim="800000"/>
+              </a14:hiddenLine>
+            </a:ext>
+          </a:extLst>
+        </p:spPr>
+        <p:style>
+          <a:lnRef idx="2">
+            <a:schemeClr val="accent1">
+              <a:shade val="50000"/>
+            </a:schemeClr>
+          </a:lnRef>
+          <a:fillRef idx="1">
+            <a:schemeClr val="accent1"/>
+          </a:fillRef>
+          <a:effectRef idx="0">
+            <a:schemeClr val="accent1"/>
+          </a:effectRef>
+          <a:fontRef idx="minor">
+            <a:schemeClr val="lt1"/>
+          </a:fontRef>
+        </p:style>
+        <p:txBody>
+          <a:bodyPr rtlCol="0" anchor="ctr"/>
+          <a:lstStyle/>
+          <a:p>
+            <a:pPr algn="ctr"/>
+            <a:endParaRPr lang="en-US"/>
+          </a:p>
+        </p:txBody>
+      </p:sp>
       <p:sp>
         <p:nvSpPr>
           <p:cNvPr id="2" name="Título 1">
@@ -17165,40 +17807,237 @@
             <p:ph type="title"/>
           </p:nvPr>
         </p:nvSpPr>
-        <p:spPr/>
+        <p:spPr>
+          <a:xfrm>
+            <a:off x="881024" y="977232"/>
+            <a:ext cx="3330906" cy="2660270"/>
+          </a:xfrm>
+        </p:spPr>
         <p:txBody>
-          <a:bodyPr/>
+          <a:bodyPr vert="horz" lIns="91440" tIns="45720" rIns="91440" bIns="45720" rtlCol="0" anchor="t">
+            <a:normAutofit/>
+          </a:bodyPr>
           <a:lstStyle/>
           <a:p>
             <a:r>
-              <a:rPr lang="es-AR" dirty="0"/>
-              <a:t>ESQUEMA GRÁFICO</a:t>
+              <a:rPr lang="en-US" sz="4200" dirty="0"/>
+              <a:t>ESQUEMA GRÁFICO del </a:t>
             </a:r>
+            <a:r>
+              <a:rPr lang="en-US" sz="4200" dirty="0" err="1"/>
+              <a:t>módulo</a:t>
+            </a:r>
+            <a:r>
+              <a:rPr lang="en-US" sz="4200" dirty="0"/>
+              <a:t> de la </a:t>
+            </a:r>
+            <a:r>
+              <a:rPr lang="en-US" sz="4200" dirty="0" err="1"/>
+              <a:t>cámara</a:t>
+            </a:r>
+            <a:endParaRPr lang="en-US" sz="4200" dirty="0"/>
           </a:p>
         </p:txBody>
       </p:sp>
-      <p:sp>
-        <p:nvSpPr>
-          <p:cNvPr id="3" name="Marcador de contenido 2">
+      <p:cxnSp>
+        <p:nvCxnSpPr>
+          <p:cNvPr id="27" name="Straight Connector 26">
             <a:extLst>
               <a:ext uri="{FF2B5EF4-FFF2-40B4-BE49-F238E27FC236}">
-                <a16:creationId xmlns:a16="http://schemas.microsoft.com/office/drawing/2014/main" id="{ACD200EB-AFF2-8F7A-280C-A864E17FAE78}"/>
+                <a16:creationId xmlns:a16="http://schemas.microsoft.com/office/drawing/2014/main" id="{EE2E603F-4A95-4FE8-BB06-211DFD75DBEF}"/>
+              </a:ext>
+              <a:ext uri="{C183D7F6-B498-43B3-948B-1728B52AA6E4}">
+                <adec:decorative xmlns:adec="http://schemas.microsoft.com/office/drawing/2017/decorative" val="1"/>
               </a:ext>
             </a:extLst>
           </p:cNvPr>
-          <p:cNvSpPr>
-            <a:spLocks noGrp="1"/>
-          </p:cNvSpPr>
+          <p:cNvCxnSpPr>
+            <a:cxnSpLocks noGrp="1" noRot="1" noChangeAspect="1" noMove="1" noResize="1" noEditPoints="1" noAdjustHandles="1" noChangeArrowheads="1" noChangeShapeType="1"/>
+          </p:cNvCxnSpPr>
+          <p:nvPr>
+            <p:extLst>
+              <p:ext uri="{386F3935-93C4-4BCD-93E2-E3B085C9AB24}">
+                <p16:designElem xmlns:p16="http://schemas.microsoft.com/office/powerpoint/2015/main" val="1"/>
+              </p:ext>
+            </p:extLst>
+          </p:nvPr>
+        </p:nvCxnSpPr>
+        <p:spPr>
+          <a:xfrm>
+            <a:off x="800100" y="723900"/>
+            <a:ext cx="10591800" cy="0"/>
+          </a:xfrm>
+          <a:prstGeom prst="line">
+            <a:avLst/>
+          </a:prstGeom>
+          <a:ln w="44450">
+            <a:solidFill>
+              <a:schemeClr val="tx1"/>
+            </a:solidFill>
+          </a:ln>
+        </p:spPr>
+        <p:style>
+          <a:lnRef idx="1">
+            <a:schemeClr val="accent1"/>
+          </a:lnRef>
+          <a:fillRef idx="0">
+            <a:schemeClr val="accent1"/>
+          </a:fillRef>
+          <a:effectRef idx="0">
+            <a:schemeClr val="accent1"/>
+          </a:effectRef>
+          <a:fontRef idx="minor">
+            <a:schemeClr val="tx1"/>
+          </a:fontRef>
+        </p:style>
+      </p:cxnSp>
+      <p:pic>
+        <p:nvPicPr>
+          <p:cNvPr id="5" name="Marcador de contenido 4" descr="Diagrama&#10;&#10;El contenido generado por IA puede ser incorrecto.">
+            <a:extLst>
+              <a:ext uri="{FF2B5EF4-FFF2-40B4-BE49-F238E27FC236}">
+                <a16:creationId xmlns:a16="http://schemas.microsoft.com/office/drawing/2014/main" id="{C46829D0-7FBD-DD30-9833-10D7C244F5F4}"/>
+              </a:ext>
+            </a:extLst>
+          </p:cNvPr>
+          <p:cNvPicPr>
+            <a:picLocks noGrp="1" noChangeAspect="1"/>
+          </p:cNvPicPr>
           <p:nvPr>
             <p:ph idx="1"/>
           </p:nvPr>
+        </p:nvPicPr>
+        <p:blipFill>
+          <a:blip r:embed="rId2">
+            <a:extLst>
+              <a:ext uri="{28A0092B-C50C-407E-A947-70E740481C1C}">
+                <a14:useLocalDpi xmlns:a14="http://schemas.microsoft.com/office/drawing/2010/main" val="0"/>
+              </a:ext>
+            </a:extLst>
+          </a:blip>
+          <a:srcRect l="7419" t="9241" r="7173" b="60329"/>
+          <a:stretch>
+            <a:fillRect/>
+          </a:stretch>
+        </p:blipFill>
+        <p:spPr>
+          <a:xfrm>
+            <a:off x="4211930" y="2149925"/>
+            <a:ext cx="7179970" cy="2558150"/>
+          </a:xfrm>
+          <a:prstGeom prst="rect">
+            <a:avLst/>
+          </a:prstGeom>
+        </p:spPr>
+      </p:pic>
+      <p:cxnSp>
+        <p:nvCxnSpPr>
+          <p:cNvPr id="29" name="Straight Connector 28">
+            <a:extLst>
+              <a:ext uri="{FF2B5EF4-FFF2-40B4-BE49-F238E27FC236}">
+                <a16:creationId xmlns:a16="http://schemas.microsoft.com/office/drawing/2014/main" id="{D7CC41EB-2D81-4303-9171-6401B388BA35}"/>
+              </a:ext>
+              <a:ext uri="{C183D7F6-B498-43B3-948B-1728B52AA6E4}">
+                <adec:decorative xmlns:adec="http://schemas.microsoft.com/office/drawing/2017/decorative" val="1"/>
+              </a:ext>
+            </a:extLst>
+          </p:cNvPr>
+          <p:cNvCxnSpPr>
+            <a:cxnSpLocks noGrp="1" noRot="1" noChangeAspect="1" noMove="1" noResize="1" noEditPoints="1" noAdjustHandles="1" noChangeArrowheads="1" noChangeShapeType="1"/>
+          </p:cNvCxnSpPr>
+          <p:nvPr>
+            <p:extLst>
+              <p:ext uri="{386F3935-93C4-4BCD-93E2-E3B085C9AB24}">
+                <p16:designElem xmlns:p16="http://schemas.microsoft.com/office/powerpoint/2015/main" val="1"/>
+              </p:ext>
+            </p:extLst>
+          </p:nvPr>
+        </p:nvCxnSpPr>
+        <p:spPr>
+          <a:xfrm>
+            <a:off x="800100" y="6134885"/>
+            <a:ext cx="10591800" cy="0"/>
+          </a:xfrm>
+          <a:prstGeom prst="line">
+            <a:avLst/>
+          </a:prstGeom>
+          <a:ln w="12700">
+            <a:solidFill>
+              <a:schemeClr val="tx1"/>
+            </a:solidFill>
+          </a:ln>
+        </p:spPr>
+        <p:style>
+          <a:lnRef idx="1">
+            <a:schemeClr val="accent1"/>
+          </a:lnRef>
+          <a:fillRef idx="0">
+            <a:schemeClr val="accent1"/>
+          </a:fillRef>
+          <a:effectRef idx="0">
+            <a:schemeClr val="accent1"/>
+          </a:effectRef>
+          <a:fontRef idx="minor">
+            <a:schemeClr val="tx1"/>
+          </a:fontRef>
+        </p:style>
+      </p:cxnSp>
+      <p:sp>
+        <p:nvSpPr>
+          <p:cNvPr id="3" name="CuadroTexto 2">
+            <a:extLst>
+              <a:ext uri="{FF2B5EF4-FFF2-40B4-BE49-F238E27FC236}">
+                <a16:creationId xmlns:a16="http://schemas.microsoft.com/office/drawing/2014/main" id="{B2D0701A-F77D-214D-D23C-CD7036F9C43D}"/>
+              </a:ext>
+            </a:extLst>
+          </p:cNvPr>
+          <p:cNvSpPr txBox="1"/>
+          <p:nvPr/>
         </p:nvSpPr>
-        <p:spPr/>
+        <p:spPr>
+          <a:xfrm>
+            <a:off x="881024" y="4061744"/>
+            <a:ext cx="2917253" cy="1200329"/>
+          </a:xfrm>
+          <a:prstGeom prst="rect">
+            <a:avLst/>
+          </a:prstGeom>
+          <a:noFill/>
+        </p:spPr>
         <p:txBody>
-          <a:bodyPr/>
+          <a:bodyPr wrap="square" rtlCol="0">
+            <a:spAutoFit/>
+          </a:bodyPr>
           <a:lstStyle/>
           <a:p>
-            <a:endParaRPr lang="es-AR" dirty="0"/>
+            <a:pPr marL="285750" indent="-285750">
+              <a:buFontTx/>
+              <a:buChar char="-"/>
+            </a:pPr>
+            <a:r>
+              <a:rPr lang="es-ES" dirty="0"/>
+              <a:t>Alimentación individual para cada componente</a:t>
+            </a:r>
+          </a:p>
+          <a:p>
+            <a:pPr marL="285750" indent="-285750">
+              <a:buFontTx/>
+              <a:buChar char="-"/>
+            </a:pPr>
+            <a:r>
+              <a:rPr lang="es-ES" dirty="0"/>
+              <a:t>ESP32 requiere 5V</a:t>
+            </a:r>
+          </a:p>
+          <a:p>
+            <a:pPr marL="285750" indent="-285750">
+              <a:buFontTx/>
+              <a:buChar char="-"/>
+            </a:pPr>
+            <a:r>
+              <a:rPr lang="es-ES" dirty="0"/>
+              <a:t>OV7670 requiere 3.3V</a:t>
+            </a:r>
           </a:p>
         </p:txBody>
       </p:sp>
@@ -17218,6 +18057,14 @@
 <file path=ppt/slides/slide7.xml><?xml version="1.0" encoding="utf-8"?>
 <p:sld xmlns:a="http://schemas.openxmlformats.org/drawingml/2006/main" xmlns:r="http://schemas.openxmlformats.org/officeDocument/2006/relationships" xmlns:p="http://schemas.openxmlformats.org/presentationml/2006/main">
   <p:cSld>
+    <p:bg>
+      <p:bgPr>
+        <a:solidFill>
+          <a:schemeClr val="bg1"/>
+        </a:solidFill>
+        <a:effectLst/>
+      </p:bgPr>
+    </p:bg>
     <p:spTree>
       <p:nvGrpSpPr>
         <p:cNvPr id="1" name=""/>
@@ -17232,6 +18079,186 @@
           <a:chExt cx="0" cy="0"/>
         </a:xfrm>
       </p:grpSpPr>
+      <p:cxnSp>
+        <p:nvCxnSpPr>
+          <p:cNvPr id="10" name="Straight Connector 9">
+            <a:extLst>
+              <a:ext uri="{FF2B5EF4-FFF2-40B4-BE49-F238E27FC236}">
+                <a16:creationId xmlns:a16="http://schemas.microsoft.com/office/drawing/2014/main" id="{F64F9B95-9045-48D2-B9F3-2927E98F54AA}"/>
+              </a:ext>
+              <a:ext uri="{C183D7F6-B498-43B3-948B-1728B52AA6E4}">
+                <adec:decorative xmlns:adec="http://schemas.microsoft.com/office/drawing/2017/decorative" val="1"/>
+              </a:ext>
+            </a:extLst>
+          </p:cNvPr>
+          <p:cNvCxnSpPr>
+            <a:cxnSpLocks noGrp="1" noRot="1" noChangeAspect="1" noMove="1" noResize="1" noEditPoints="1" noAdjustHandles="1" noChangeArrowheads="1" noChangeShapeType="1"/>
+          </p:cNvCxnSpPr>
+          <p:nvPr>
+            <p:extLst>
+              <p:ext uri="{386F3935-93C4-4BCD-93E2-E3B085C9AB24}">
+                <p16:designElem xmlns:p16="http://schemas.microsoft.com/office/powerpoint/2015/main" val="1"/>
+              </p:ext>
+            </p:extLst>
+          </p:nvPr>
+        </p:nvCxnSpPr>
+        <p:spPr>
+          <a:xfrm>
+            <a:off x="800100" y="723900"/>
+            <a:ext cx="10591800" cy="0"/>
+          </a:xfrm>
+          <a:prstGeom prst="line">
+            <a:avLst/>
+          </a:prstGeom>
+          <a:ln w="44450">
+            <a:solidFill>
+              <a:schemeClr val="tx1"/>
+            </a:solidFill>
+          </a:ln>
+        </p:spPr>
+        <p:style>
+          <a:lnRef idx="1">
+            <a:schemeClr val="accent1"/>
+          </a:lnRef>
+          <a:fillRef idx="0">
+            <a:schemeClr val="accent1"/>
+          </a:fillRef>
+          <a:effectRef idx="0">
+            <a:schemeClr val="accent1"/>
+          </a:effectRef>
+          <a:fontRef idx="minor">
+            <a:schemeClr val="tx1"/>
+          </a:fontRef>
+        </p:style>
+      </p:cxnSp>
+      <p:cxnSp>
+        <p:nvCxnSpPr>
+          <p:cNvPr id="12" name="Straight Connector 11">
+            <a:extLst>
+              <a:ext uri="{FF2B5EF4-FFF2-40B4-BE49-F238E27FC236}">
+                <a16:creationId xmlns:a16="http://schemas.microsoft.com/office/drawing/2014/main" id="{085AA86F-6A4D-4BCB-A045-D992CDC2959B}"/>
+              </a:ext>
+              <a:ext uri="{C183D7F6-B498-43B3-948B-1728B52AA6E4}">
+                <adec:decorative xmlns:adec="http://schemas.microsoft.com/office/drawing/2017/decorative" val="1"/>
+              </a:ext>
+            </a:extLst>
+          </p:cNvPr>
+          <p:cNvCxnSpPr>
+            <a:cxnSpLocks noGrp="1" noRot="1" noChangeAspect="1" noMove="1" noResize="1" noEditPoints="1" noAdjustHandles="1" noChangeArrowheads="1" noChangeShapeType="1"/>
+          </p:cNvCxnSpPr>
+          <p:nvPr>
+            <p:extLst>
+              <p:ext uri="{386F3935-93C4-4BCD-93E2-E3B085C9AB24}">
+                <p16:designElem xmlns:p16="http://schemas.microsoft.com/office/powerpoint/2015/main" val="1"/>
+              </p:ext>
+            </p:extLst>
+          </p:nvPr>
+        </p:nvCxnSpPr>
+        <p:spPr>
+          <a:xfrm>
+            <a:off x="800100" y="6142781"/>
+            <a:ext cx="10591800" cy="0"/>
+          </a:xfrm>
+          <a:prstGeom prst="line">
+            <a:avLst/>
+          </a:prstGeom>
+          <a:ln w="12700">
+            <a:solidFill>
+              <a:schemeClr val="tx1"/>
+            </a:solidFill>
+          </a:ln>
+        </p:spPr>
+        <p:style>
+          <a:lnRef idx="1">
+            <a:schemeClr val="accent1"/>
+          </a:lnRef>
+          <a:fillRef idx="0">
+            <a:schemeClr val="accent1"/>
+          </a:fillRef>
+          <a:effectRef idx="0">
+            <a:schemeClr val="accent1"/>
+          </a:effectRef>
+          <a:fontRef idx="minor">
+            <a:schemeClr val="tx1"/>
+          </a:fontRef>
+        </p:style>
+      </p:cxnSp>
+      <p:sp useBgFill="1">
+        <p:nvSpPr>
+          <p:cNvPr id="14" name="Rectangle 13">
+            <a:extLst>
+              <a:ext uri="{FF2B5EF4-FFF2-40B4-BE49-F238E27FC236}">
+                <a16:creationId xmlns:a16="http://schemas.microsoft.com/office/drawing/2014/main" id="{33E93247-6229-44AB-A550-739E971E690B}"/>
+              </a:ext>
+              <a:ext uri="{C183D7F6-B498-43B3-948B-1728B52AA6E4}">
+                <adec:decorative xmlns:adec="http://schemas.microsoft.com/office/drawing/2017/decorative" val="1"/>
+              </a:ext>
+            </a:extLst>
+          </p:cNvPr>
+          <p:cNvSpPr>
+            <a:spLocks noGrp="1" noRot="1" noChangeAspect="1" noMove="1" noResize="1" noEditPoints="1" noAdjustHandles="1" noChangeArrowheads="1" noChangeShapeType="1" noTextEdit="1"/>
+          </p:cNvSpPr>
+          <p:nvPr>
+            <p:extLst>
+              <p:ext uri="{386F3935-93C4-4BCD-93E2-E3B085C9AB24}">
+                <p16:designElem xmlns:p16="http://schemas.microsoft.com/office/powerpoint/2015/main" val="1"/>
+              </p:ext>
+            </p:extLst>
+          </p:nvPr>
+        </p:nvSpPr>
+        <p:spPr>
+          <a:xfrm>
+            <a:off x="0" y="0"/>
+            <a:ext cx="12192000" cy="6858000"/>
+          </a:xfrm>
+          <a:prstGeom prst="rect">
+            <a:avLst/>
+          </a:prstGeom>
+          <a:ln w="12700" cap="flat" cmpd="sng" algn="ctr">
+            <a:noFill/>
+            <a:prstDash val="solid"/>
+            <a:miter lim="800000"/>
+          </a:ln>
+          <a:effectLst/>
+          <a:extLst>
+            <a:ext uri="{91240B29-F687-4F45-9708-019B960494DF}">
+              <a14:hiddenLine xmlns:a14="http://schemas.microsoft.com/office/drawing/2010/main" w="12700" cap="flat" cmpd="sng" algn="ctr">
+                <a:solidFill>
+                  <a:schemeClr val="accent1">
+                    <a:shade val="50000"/>
+                  </a:schemeClr>
+                </a:solidFill>
+                <a:prstDash val="solid"/>
+                <a:miter lim="800000"/>
+              </a14:hiddenLine>
+            </a:ext>
+          </a:extLst>
+        </p:spPr>
+        <p:style>
+          <a:lnRef idx="2">
+            <a:schemeClr val="accent1">
+              <a:shade val="50000"/>
+            </a:schemeClr>
+          </a:lnRef>
+          <a:fillRef idx="1">
+            <a:schemeClr val="accent1"/>
+          </a:fillRef>
+          <a:effectRef idx="0">
+            <a:schemeClr val="accent1"/>
+          </a:effectRef>
+          <a:fontRef idx="minor">
+            <a:schemeClr val="lt1"/>
+          </a:fontRef>
+        </p:style>
+        <p:txBody>
+          <a:bodyPr rtlCol="0" anchor="ctr"/>
+          <a:lstStyle/>
+          <a:p>
+            <a:pPr algn="ctr"/>
+            <a:endParaRPr lang="en-US"/>
+          </a:p>
+        </p:txBody>
+      </p:sp>
       <p:sp>
         <p:nvSpPr>
           <p:cNvPr id="2" name="Título 1">
@@ -17248,37 +18275,250 @@
             <p:ph type="title"/>
           </p:nvPr>
         </p:nvSpPr>
-        <p:spPr/>
+        <p:spPr>
+          <a:xfrm>
+            <a:off x="7988440" y="1056494"/>
+            <a:ext cx="3480625" cy="2570962"/>
+          </a:xfrm>
+        </p:spPr>
         <p:txBody>
-          <a:bodyPr/>
+          <a:bodyPr vert="horz" lIns="91440" tIns="45720" rIns="91440" bIns="45720" rtlCol="0" anchor="t">
+            <a:normAutofit/>
+          </a:bodyPr>
           <a:lstStyle/>
           <a:p>
-            <a:endParaRPr lang="es-AR"/>
+            <a:r>
+              <a:rPr lang="en-US" sz="3900" dirty="0" err="1"/>
+              <a:t>Diagrama</a:t>
+            </a:r>
+            <a:r>
+              <a:rPr lang="en-US" sz="3900" dirty="0"/>
+              <a:t> de </a:t>
+            </a:r>
+            <a:r>
+              <a:rPr lang="en-US" sz="3900" dirty="0" err="1"/>
+              <a:t>conexiones</a:t>
+            </a:r>
+            <a:r>
+              <a:rPr lang="en-US" sz="3900" dirty="0"/>
+              <a:t> del </a:t>
+            </a:r>
+            <a:r>
+              <a:rPr lang="en-US" sz="3900" dirty="0" err="1"/>
+              <a:t>módulo</a:t>
+            </a:r>
+            <a:r>
+              <a:rPr lang="en-US" sz="3900" dirty="0"/>
+              <a:t> de la </a:t>
+            </a:r>
+            <a:r>
+              <a:rPr lang="en-US" sz="3900" dirty="0" err="1"/>
+              <a:t>cámara</a:t>
+            </a:r>
+            <a:endParaRPr lang="en-US" sz="3900" dirty="0"/>
           </a:p>
         </p:txBody>
       </p:sp>
-      <p:sp>
-        <p:nvSpPr>
-          <p:cNvPr id="3" name="Marcador de contenido 2">
+      <p:cxnSp>
+        <p:nvCxnSpPr>
+          <p:cNvPr id="16" name="Straight Connector 15">
             <a:extLst>
               <a:ext uri="{FF2B5EF4-FFF2-40B4-BE49-F238E27FC236}">
-                <a16:creationId xmlns:a16="http://schemas.microsoft.com/office/drawing/2014/main" id="{922D313A-2D1B-558E-1B52-D48C1C31C7AB}"/>
+                <a16:creationId xmlns:a16="http://schemas.microsoft.com/office/drawing/2014/main" id="{EE2E603F-4A95-4FE8-BB06-211DFD75DBEF}"/>
+              </a:ext>
+              <a:ext uri="{C183D7F6-B498-43B3-948B-1728B52AA6E4}">
+                <adec:decorative xmlns:adec="http://schemas.microsoft.com/office/drawing/2017/decorative" val="1"/>
               </a:ext>
             </a:extLst>
           </p:cNvPr>
-          <p:cNvSpPr>
-            <a:spLocks noGrp="1"/>
-          </p:cNvSpPr>
+          <p:cNvCxnSpPr>
+            <a:cxnSpLocks noGrp="1" noRot="1" noChangeAspect="1" noMove="1" noResize="1" noEditPoints="1" noAdjustHandles="1" noChangeArrowheads="1" noChangeShapeType="1"/>
+          </p:cNvCxnSpPr>
+          <p:nvPr>
+            <p:extLst>
+              <p:ext uri="{386F3935-93C4-4BCD-93E2-E3B085C9AB24}">
+                <p16:designElem xmlns:p16="http://schemas.microsoft.com/office/powerpoint/2015/main" val="1"/>
+              </p:ext>
+            </p:extLst>
+          </p:nvPr>
+        </p:nvCxnSpPr>
+        <p:spPr>
+          <a:xfrm>
+            <a:off x="800100" y="723900"/>
+            <a:ext cx="10591800" cy="0"/>
+          </a:xfrm>
+          <a:prstGeom prst="line">
+            <a:avLst/>
+          </a:prstGeom>
+          <a:ln w="44450">
+            <a:solidFill>
+              <a:schemeClr val="tx1"/>
+            </a:solidFill>
+          </a:ln>
+        </p:spPr>
+        <p:style>
+          <a:lnRef idx="1">
+            <a:schemeClr val="accent1"/>
+          </a:lnRef>
+          <a:fillRef idx="0">
+            <a:schemeClr val="accent1"/>
+          </a:fillRef>
+          <a:effectRef idx="0">
+            <a:schemeClr val="accent1"/>
+          </a:effectRef>
+          <a:fontRef idx="minor">
+            <a:schemeClr val="tx1"/>
+          </a:fontRef>
+        </p:style>
+      </p:cxnSp>
+      <p:pic>
+        <p:nvPicPr>
+          <p:cNvPr id="5" name="Marcador de contenido 4" descr="Diagrama, Esquemático&#10;&#10;El contenido generado por IA puede ser incorrecto.">
+            <a:extLst>
+              <a:ext uri="{FF2B5EF4-FFF2-40B4-BE49-F238E27FC236}">
+                <a16:creationId xmlns:a16="http://schemas.microsoft.com/office/drawing/2014/main" id="{37B38207-D641-89BC-B425-5B73018C7011}"/>
+              </a:ext>
+            </a:extLst>
+          </p:cNvPr>
+          <p:cNvPicPr>
+            <a:picLocks noGrp="1" noChangeAspect="1"/>
+          </p:cNvPicPr>
           <p:nvPr>
             <p:ph idx="1"/>
           </p:nvPr>
+        </p:nvPicPr>
+        <p:blipFill>
+          <a:blip r:embed="rId2">
+            <a:extLst>
+              <a:ext uri="{28A0092B-C50C-407E-A947-70E740481C1C}">
+                <a14:useLocalDpi xmlns:a14="http://schemas.microsoft.com/office/drawing/2010/main" val="0"/>
+              </a:ext>
+            </a:extLst>
+          </a:blip>
+          <a:srcRect l="6254" t="3058" r="13536" b="52614"/>
+          <a:stretch>
+            <a:fillRect/>
+          </a:stretch>
+        </p:blipFill>
+        <p:spPr>
+          <a:xfrm>
+            <a:off x="722935" y="1401311"/>
+            <a:ext cx="7179970" cy="4059338"/>
+          </a:xfrm>
+          <a:prstGeom prst="rect">
+            <a:avLst/>
+          </a:prstGeom>
+        </p:spPr>
+      </p:pic>
+      <p:cxnSp>
+        <p:nvCxnSpPr>
+          <p:cNvPr id="18" name="Straight Connector 17">
+            <a:extLst>
+              <a:ext uri="{FF2B5EF4-FFF2-40B4-BE49-F238E27FC236}">
+                <a16:creationId xmlns:a16="http://schemas.microsoft.com/office/drawing/2014/main" id="{D7CC41EB-2D81-4303-9171-6401B388BA35}"/>
+              </a:ext>
+              <a:ext uri="{C183D7F6-B498-43B3-948B-1728B52AA6E4}">
+                <adec:decorative xmlns:adec="http://schemas.microsoft.com/office/drawing/2017/decorative" val="1"/>
+              </a:ext>
+            </a:extLst>
+          </p:cNvPr>
+          <p:cNvCxnSpPr>
+            <a:cxnSpLocks noGrp="1" noRot="1" noChangeAspect="1" noMove="1" noResize="1" noEditPoints="1" noAdjustHandles="1" noChangeArrowheads="1" noChangeShapeType="1"/>
+          </p:cNvCxnSpPr>
+          <p:nvPr>
+            <p:extLst>
+              <p:ext uri="{386F3935-93C4-4BCD-93E2-E3B085C9AB24}">
+                <p16:designElem xmlns:p16="http://schemas.microsoft.com/office/powerpoint/2015/main" val="1"/>
+              </p:ext>
+            </p:extLst>
+          </p:nvPr>
+        </p:nvCxnSpPr>
+        <p:spPr>
+          <a:xfrm>
+            <a:off x="800100" y="6134885"/>
+            <a:ext cx="10591800" cy="0"/>
+          </a:xfrm>
+          <a:prstGeom prst="line">
+            <a:avLst/>
+          </a:prstGeom>
+          <a:ln w="12700">
+            <a:solidFill>
+              <a:schemeClr val="tx1"/>
+            </a:solidFill>
+          </a:ln>
+        </p:spPr>
+        <p:style>
+          <a:lnRef idx="1">
+            <a:schemeClr val="accent1"/>
+          </a:lnRef>
+          <a:fillRef idx="0">
+            <a:schemeClr val="accent1"/>
+          </a:fillRef>
+          <a:effectRef idx="0">
+            <a:schemeClr val="accent1"/>
+          </a:effectRef>
+          <a:fontRef idx="minor">
+            <a:schemeClr val="tx1"/>
+          </a:fontRef>
+        </p:style>
+      </p:cxnSp>
+      <p:sp>
+        <p:nvSpPr>
+          <p:cNvPr id="3" name="CuadroTexto 2">
+            <a:extLst>
+              <a:ext uri="{FF2B5EF4-FFF2-40B4-BE49-F238E27FC236}">
+                <a16:creationId xmlns:a16="http://schemas.microsoft.com/office/drawing/2014/main" id="{1881C788-BBDB-E67C-B809-0140F88715E9}"/>
+              </a:ext>
+            </a:extLst>
+          </p:cNvPr>
+          <p:cNvSpPr txBox="1"/>
+          <p:nvPr/>
         </p:nvSpPr>
-        <p:spPr/>
+        <p:spPr>
+          <a:xfrm>
+            <a:off x="7902905" y="3928905"/>
+            <a:ext cx="3566160" cy="923330"/>
+          </a:xfrm>
+          <a:prstGeom prst="rect">
+            <a:avLst/>
+          </a:prstGeom>
+          <a:noFill/>
+        </p:spPr>
         <p:txBody>
-          <a:bodyPr/>
+          <a:bodyPr wrap="square" rtlCol="0">
+            <a:spAutoFit/>
+          </a:bodyPr>
           <a:lstStyle/>
           <a:p>
-            <a:endParaRPr lang="es-AR"/>
+            <a:pPr marL="285750" indent="-285750">
+              <a:buFontTx/>
+              <a:buChar char="-"/>
+            </a:pPr>
+            <a:r>
+              <a:rPr lang="es-ES" dirty="0"/>
+              <a:t>Conexiones de protocolo SCCB</a:t>
+            </a:r>
+          </a:p>
+          <a:p>
+            <a:pPr marL="285750" indent="-285750">
+              <a:buFontTx/>
+              <a:buChar char="-"/>
+            </a:pPr>
+            <a:r>
+              <a:rPr lang="es-ES" dirty="0"/>
+              <a:t>Conexiones de líneas de control</a:t>
+            </a:r>
+          </a:p>
+          <a:p>
+            <a:pPr marL="285750" indent="-285750">
+              <a:buFontTx/>
+              <a:buChar char="-"/>
+            </a:pPr>
+            <a:r>
+              <a:rPr lang="es-ES" dirty="0"/>
+              <a:t>Bus de datos</a:t>
+            </a:r>
+            <a:endParaRPr lang="es-AR" dirty="0"/>
           </a:p>
         </p:txBody>
       </p:sp>
@@ -17298,9 +18538,23 @@
 <file path=ppt/slides/slide8.xml><?xml version="1.0" encoding="utf-8"?>
 <p:sld xmlns:a="http://schemas.openxmlformats.org/drawingml/2006/main" xmlns:r="http://schemas.openxmlformats.org/officeDocument/2006/relationships" xmlns:p="http://schemas.openxmlformats.org/presentationml/2006/main">
   <p:cSld>
+    <p:bg>
+      <p:bgPr>
+        <a:solidFill>
+          <a:schemeClr val="bg1"/>
+        </a:solidFill>
+        <a:effectLst/>
+      </p:bgPr>
+    </p:bg>
     <p:spTree>
       <p:nvGrpSpPr>
-        <p:cNvPr id="1" name=""/>
+        <p:cNvPr id="1" name="">
+          <a:extLst>
+            <a:ext uri="{FF2B5EF4-FFF2-40B4-BE49-F238E27FC236}">
+              <a16:creationId xmlns:a16="http://schemas.microsoft.com/office/drawing/2014/main" id="{F5319581-DB57-C21A-8A49-941C14CF78C6}"/>
+            </a:ext>
+          </a:extLst>
+        </p:cNvPr>
         <p:cNvGrpSpPr/>
         <p:nvPr/>
       </p:nvGrpSpPr>
@@ -17312,12 +18566,192 @@
           <a:chExt cx="0" cy="0"/>
         </a:xfrm>
       </p:grpSpPr>
+      <p:cxnSp>
+        <p:nvCxnSpPr>
+          <p:cNvPr id="45" name="Straight Connector 44">
+            <a:extLst>
+              <a:ext uri="{FF2B5EF4-FFF2-40B4-BE49-F238E27FC236}">
+                <a16:creationId xmlns:a16="http://schemas.microsoft.com/office/drawing/2014/main" id="{F64F9B95-9045-48D2-B9F3-2927E98F54AA}"/>
+              </a:ext>
+              <a:ext uri="{C183D7F6-B498-43B3-948B-1728B52AA6E4}">
+                <adec:decorative xmlns:adec="http://schemas.microsoft.com/office/drawing/2017/decorative" val="1"/>
+              </a:ext>
+            </a:extLst>
+          </p:cNvPr>
+          <p:cNvCxnSpPr>
+            <a:cxnSpLocks noGrp="1" noRot="1" noChangeAspect="1" noMove="1" noResize="1" noEditPoints="1" noAdjustHandles="1" noChangeArrowheads="1" noChangeShapeType="1"/>
+          </p:cNvCxnSpPr>
+          <p:nvPr>
+            <p:extLst>
+              <p:ext uri="{386F3935-93C4-4BCD-93E2-E3B085C9AB24}">
+                <p16:designElem xmlns:p16="http://schemas.microsoft.com/office/powerpoint/2015/main" val="1"/>
+              </p:ext>
+            </p:extLst>
+          </p:nvPr>
+        </p:nvCxnSpPr>
+        <p:spPr>
+          <a:xfrm>
+            <a:off x="800100" y="723900"/>
+            <a:ext cx="10591800" cy="0"/>
+          </a:xfrm>
+          <a:prstGeom prst="line">
+            <a:avLst/>
+          </a:prstGeom>
+          <a:ln w="44450">
+            <a:solidFill>
+              <a:schemeClr val="tx1"/>
+            </a:solidFill>
+          </a:ln>
+        </p:spPr>
+        <p:style>
+          <a:lnRef idx="1">
+            <a:schemeClr val="accent1"/>
+          </a:lnRef>
+          <a:fillRef idx="0">
+            <a:schemeClr val="accent1"/>
+          </a:fillRef>
+          <a:effectRef idx="0">
+            <a:schemeClr val="accent1"/>
+          </a:effectRef>
+          <a:fontRef idx="minor">
+            <a:schemeClr val="tx1"/>
+          </a:fontRef>
+        </p:style>
+      </p:cxnSp>
+      <p:cxnSp>
+        <p:nvCxnSpPr>
+          <p:cNvPr id="47" name="Straight Connector 46">
+            <a:extLst>
+              <a:ext uri="{FF2B5EF4-FFF2-40B4-BE49-F238E27FC236}">
+                <a16:creationId xmlns:a16="http://schemas.microsoft.com/office/drawing/2014/main" id="{085AA86F-6A4D-4BCB-A045-D992CDC2959B}"/>
+              </a:ext>
+              <a:ext uri="{C183D7F6-B498-43B3-948B-1728B52AA6E4}">
+                <adec:decorative xmlns:adec="http://schemas.microsoft.com/office/drawing/2017/decorative" val="1"/>
+              </a:ext>
+            </a:extLst>
+          </p:cNvPr>
+          <p:cNvCxnSpPr>
+            <a:cxnSpLocks noGrp="1" noRot="1" noChangeAspect="1" noMove="1" noResize="1" noEditPoints="1" noAdjustHandles="1" noChangeArrowheads="1" noChangeShapeType="1"/>
+          </p:cNvCxnSpPr>
+          <p:nvPr>
+            <p:extLst>
+              <p:ext uri="{386F3935-93C4-4BCD-93E2-E3B085C9AB24}">
+                <p16:designElem xmlns:p16="http://schemas.microsoft.com/office/powerpoint/2015/main" val="1"/>
+              </p:ext>
+            </p:extLst>
+          </p:nvPr>
+        </p:nvCxnSpPr>
+        <p:spPr>
+          <a:xfrm>
+            <a:off x="800100" y="6142781"/>
+            <a:ext cx="10591800" cy="0"/>
+          </a:xfrm>
+          <a:prstGeom prst="line">
+            <a:avLst/>
+          </a:prstGeom>
+          <a:ln w="12700">
+            <a:solidFill>
+              <a:schemeClr val="tx1"/>
+            </a:solidFill>
+          </a:ln>
+        </p:spPr>
+        <p:style>
+          <a:lnRef idx="1">
+            <a:schemeClr val="accent1"/>
+          </a:lnRef>
+          <a:fillRef idx="0">
+            <a:schemeClr val="accent1"/>
+          </a:fillRef>
+          <a:effectRef idx="0">
+            <a:schemeClr val="accent1"/>
+          </a:effectRef>
+          <a:fontRef idx="minor">
+            <a:schemeClr val="tx1"/>
+          </a:fontRef>
+        </p:style>
+      </p:cxnSp>
+      <p:sp useBgFill="1">
+        <p:nvSpPr>
+          <p:cNvPr id="49" name="Rectangle 48">
+            <a:extLst>
+              <a:ext uri="{FF2B5EF4-FFF2-40B4-BE49-F238E27FC236}">
+                <a16:creationId xmlns:a16="http://schemas.microsoft.com/office/drawing/2014/main" id="{33E93247-6229-44AB-A550-739E971E690B}"/>
+              </a:ext>
+              <a:ext uri="{C183D7F6-B498-43B3-948B-1728B52AA6E4}">
+                <adec:decorative xmlns:adec="http://schemas.microsoft.com/office/drawing/2017/decorative" val="1"/>
+              </a:ext>
+            </a:extLst>
+          </p:cNvPr>
+          <p:cNvSpPr>
+            <a:spLocks noGrp="1" noRot="1" noChangeAspect="1" noMove="1" noResize="1" noEditPoints="1" noAdjustHandles="1" noChangeArrowheads="1" noChangeShapeType="1" noTextEdit="1"/>
+          </p:cNvSpPr>
+          <p:nvPr>
+            <p:extLst>
+              <p:ext uri="{386F3935-93C4-4BCD-93E2-E3B085C9AB24}">
+                <p16:designElem xmlns:p16="http://schemas.microsoft.com/office/powerpoint/2015/main" val="1"/>
+              </p:ext>
+            </p:extLst>
+          </p:nvPr>
+        </p:nvSpPr>
+        <p:spPr>
+          <a:xfrm>
+            <a:off x="0" y="0"/>
+            <a:ext cx="12192000" cy="6858000"/>
+          </a:xfrm>
+          <a:prstGeom prst="rect">
+            <a:avLst/>
+          </a:prstGeom>
+          <a:ln w="12700" cap="flat" cmpd="sng" algn="ctr">
+            <a:noFill/>
+            <a:prstDash val="solid"/>
+            <a:miter lim="800000"/>
+          </a:ln>
+          <a:effectLst/>
+          <a:extLst>
+            <a:ext uri="{91240B29-F687-4F45-9708-019B960494DF}">
+              <a14:hiddenLine xmlns:a14="http://schemas.microsoft.com/office/drawing/2010/main" w="12700" cap="flat" cmpd="sng" algn="ctr">
+                <a:solidFill>
+                  <a:schemeClr val="accent1">
+                    <a:shade val="50000"/>
+                  </a:schemeClr>
+                </a:solidFill>
+                <a:prstDash val="solid"/>
+                <a:miter lim="800000"/>
+              </a14:hiddenLine>
+            </a:ext>
+          </a:extLst>
+        </p:spPr>
+        <p:style>
+          <a:lnRef idx="2">
+            <a:schemeClr val="accent1">
+              <a:shade val="50000"/>
+            </a:schemeClr>
+          </a:lnRef>
+          <a:fillRef idx="1">
+            <a:schemeClr val="accent1"/>
+          </a:fillRef>
+          <a:effectRef idx="0">
+            <a:schemeClr val="accent1"/>
+          </a:effectRef>
+          <a:fontRef idx="minor">
+            <a:schemeClr val="lt1"/>
+          </a:fontRef>
+        </p:style>
+        <p:txBody>
+          <a:bodyPr rtlCol="0" anchor="ctr"/>
+          <a:lstStyle/>
+          <a:p>
+            <a:pPr algn="ctr"/>
+            <a:endParaRPr lang="en-US"/>
+          </a:p>
+        </p:txBody>
+      </p:sp>
       <p:sp>
         <p:nvSpPr>
           <p:cNvPr id="2" name="Título 1">
             <a:extLst>
               <a:ext uri="{FF2B5EF4-FFF2-40B4-BE49-F238E27FC236}">
-                <a16:creationId xmlns:a16="http://schemas.microsoft.com/office/drawing/2014/main" id="{D1CCE9F7-D283-AD57-E9E3-E0BEEB3E36FB}"/>
+                <a16:creationId xmlns:a16="http://schemas.microsoft.com/office/drawing/2014/main" id="{0A118BEC-98CC-93C5-D94C-52B93BA9FCF9}"/>
               </a:ext>
             </a:extLst>
           </p:cNvPr>
@@ -17328,44 +18762,238 @@
             <p:ph type="title"/>
           </p:nvPr>
         </p:nvSpPr>
-        <p:spPr/>
+        <p:spPr>
+          <a:xfrm>
+            <a:off x="881024" y="1120158"/>
+            <a:ext cx="3330906" cy="2751450"/>
+          </a:xfrm>
+        </p:spPr>
         <p:txBody>
-          <a:bodyPr/>
+          <a:bodyPr vert="horz" lIns="91440" tIns="45720" rIns="91440" bIns="45720" rtlCol="0" anchor="t">
+            <a:normAutofit/>
+          </a:bodyPr>
           <a:lstStyle/>
           <a:p>
-            <a:endParaRPr lang="es-AR"/>
+            <a:r>
+              <a:rPr lang="en-US" sz="4200" dirty="0"/>
+              <a:t>ESQUEMA GRÁFICO del </a:t>
+            </a:r>
+            <a:r>
+              <a:rPr lang="en-US" sz="4200" dirty="0" err="1"/>
+              <a:t>módulo</a:t>
+            </a:r>
+            <a:r>
+              <a:rPr lang="en-US" sz="4200" dirty="0"/>
+              <a:t> </a:t>
+            </a:r>
+            <a:r>
+              <a:rPr lang="en-US" sz="4200" dirty="0" err="1"/>
+              <a:t>deL</a:t>
+            </a:r>
+            <a:r>
+              <a:rPr lang="en-US" sz="4200" dirty="0"/>
+              <a:t> auto</a:t>
+            </a:r>
           </a:p>
         </p:txBody>
       </p:sp>
-      <p:sp>
-        <p:nvSpPr>
-          <p:cNvPr id="3" name="Marcador de contenido 2">
+      <p:cxnSp>
+        <p:nvCxnSpPr>
+          <p:cNvPr id="51" name="Straight Connector 50">
             <a:extLst>
               <a:ext uri="{FF2B5EF4-FFF2-40B4-BE49-F238E27FC236}">
-                <a16:creationId xmlns:a16="http://schemas.microsoft.com/office/drawing/2014/main" id="{124E226E-055D-9BE6-57F1-3587D9D784EA}"/>
+                <a16:creationId xmlns:a16="http://schemas.microsoft.com/office/drawing/2014/main" id="{EE2E603F-4A95-4FE8-BB06-211DFD75DBEF}"/>
+              </a:ext>
+              <a:ext uri="{C183D7F6-B498-43B3-948B-1728B52AA6E4}">
+                <adec:decorative xmlns:adec="http://schemas.microsoft.com/office/drawing/2017/decorative" val="1"/>
               </a:ext>
             </a:extLst>
           </p:cNvPr>
-          <p:cNvSpPr>
-            <a:spLocks noGrp="1"/>
-          </p:cNvSpPr>
+          <p:cNvCxnSpPr>
+            <a:cxnSpLocks noGrp="1" noRot="1" noChangeAspect="1" noMove="1" noResize="1" noEditPoints="1" noAdjustHandles="1" noChangeArrowheads="1" noChangeShapeType="1"/>
+          </p:cNvCxnSpPr>
+          <p:nvPr>
+            <p:extLst>
+              <p:ext uri="{386F3935-93C4-4BCD-93E2-E3B085C9AB24}">
+                <p16:designElem xmlns:p16="http://schemas.microsoft.com/office/powerpoint/2015/main" val="1"/>
+              </p:ext>
+            </p:extLst>
+          </p:nvPr>
+        </p:nvCxnSpPr>
+        <p:spPr>
+          <a:xfrm>
+            <a:off x="800100" y="723900"/>
+            <a:ext cx="10591800" cy="0"/>
+          </a:xfrm>
+          <a:prstGeom prst="line">
+            <a:avLst/>
+          </a:prstGeom>
+          <a:ln w="44450">
+            <a:solidFill>
+              <a:schemeClr val="tx1"/>
+            </a:solidFill>
+          </a:ln>
+        </p:spPr>
+        <p:style>
+          <a:lnRef idx="1">
+            <a:schemeClr val="accent1"/>
+          </a:lnRef>
+          <a:fillRef idx="0">
+            <a:schemeClr val="accent1"/>
+          </a:fillRef>
+          <a:effectRef idx="0">
+            <a:schemeClr val="accent1"/>
+          </a:effectRef>
+          <a:fontRef idx="minor">
+            <a:schemeClr val="tx1"/>
+          </a:fontRef>
+        </p:style>
+      </p:cxnSp>
+      <p:pic>
+        <p:nvPicPr>
+          <p:cNvPr id="5" name="Marcador de contenido 4" descr="Diagrama&#10;&#10;El contenido generado por IA puede ser incorrecto.">
+            <a:extLst>
+              <a:ext uri="{FF2B5EF4-FFF2-40B4-BE49-F238E27FC236}">
+                <a16:creationId xmlns:a16="http://schemas.microsoft.com/office/drawing/2014/main" id="{02F4AB8A-F56A-294C-1962-9E288D64A19E}"/>
+              </a:ext>
+            </a:extLst>
+          </p:cNvPr>
+          <p:cNvPicPr>
+            <a:picLocks noGrp="1" noChangeAspect="1"/>
+          </p:cNvPicPr>
           <p:nvPr>
             <p:ph idx="1"/>
           </p:nvPr>
+        </p:nvPicPr>
+        <p:blipFill>
+          <a:blip r:embed="rId2">
+            <a:extLst>
+              <a:ext uri="{28A0092B-C50C-407E-A947-70E740481C1C}">
+                <a14:useLocalDpi xmlns:a14="http://schemas.microsoft.com/office/drawing/2010/main" val="0"/>
+              </a:ext>
+            </a:extLst>
+          </a:blip>
+          <a:srcRect l="4296" t="47994" r="7433" b="6491"/>
+          <a:stretch>
+            <a:fillRect/>
+          </a:stretch>
+        </p:blipFill>
+        <p:spPr>
+          <a:xfrm>
+            <a:off x="4211930" y="1636814"/>
+            <a:ext cx="7179970" cy="3702194"/>
+          </a:xfrm>
+          <a:prstGeom prst="rect">
+            <a:avLst/>
+          </a:prstGeom>
+        </p:spPr>
+      </p:pic>
+      <p:cxnSp>
+        <p:nvCxnSpPr>
+          <p:cNvPr id="53" name="Straight Connector 52">
+            <a:extLst>
+              <a:ext uri="{FF2B5EF4-FFF2-40B4-BE49-F238E27FC236}">
+                <a16:creationId xmlns:a16="http://schemas.microsoft.com/office/drawing/2014/main" id="{D7CC41EB-2D81-4303-9171-6401B388BA35}"/>
+              </a:ext>
+              <a:ext uri="{C183D7F6-B498-43B3-948B-1728B52AA6E4}">
+                <adec:decorative xmlns:adec="http://schemas.microsoft.com/office/drawing/2017/decorative" val="1"/>
+              </a:ext>
+            </a:extLst>
+          </p:cNvPr>
+          <p:cNvCxnSpPr>
+            <a:cxnSpLocks noGrp="1" noRot="1" noChangeAspect="1" noMove="1" noResize="1" noEditPoints="1" noAdjustHandles="1" noChangeArrowheads="1" noChangeShapeType="1"/>
+          </p:cNvCxnSpPr>
+          <p:nvPr>
+            <p:extLst>
+              <p:ext uri="{386F3935-93C4-4BCD-93E2-E3B085C9AB24}">
+                <p16:designElem xmlns:p16="http://schemas.microsoft.com/office/powerpoint/2015/main" val="1"/>
+              </p:ext>
+            </p:extLst>
+          </p:nvPr>
+        </p:nvCxnSpPr>
+        <p:spPr>
+          <a:xfrm>
+            <a:off x="800100" y="6134885"/>
+            <a:ext cx="10591800" cy="0"/>
+          </a:xfrm>
+          <a:prstGeom prst="line">
+            <a:avLst/>
+          </a:prstGeom>
+          <a:ln w="12700">
+            <a:solidFill>
+              <a:schemeClr val="tx1"/>
+            </a:solidFill>
+          </a:ln>
+        </p:spPr>
+        <p:style>
+          <a:lnRef idx="1">
+            <a:schemeClr val="accent1"/>
+          </a:lnRef>
+          <a:fillRef idx="0">
+            <a:schemeClr val="accent1"/>
+          </a:fillRef>
+          <a:effectRef idx="0">
+            <a:schemeClr val="accent1"/>
+          </a:effectRef>
+          <a:fontRef idx="minor">
+            <a:schemeClr val="tx1"/>
+          </a:fontRef>
+        </p:style>
+      </p:cxnSp>
+      <p:sp>
+        <p:nvSpPr>
+          <p:cNvPr id="3" name="CuadroTexto 2">
+            <a:extLst>
+              <a:ext uri="{FF2B5EF4-FFF2-40B4-BE49-F238E27FC236}">
+                <a16:creationId xmlns:a16="http://schemas.microsoft.com/office/drawing/2014/main" id="{24EEC57F-54AA-AD9B-B2B3-C5819D06D73D}"/>
+              </a:ext>
+            </a:extLst>
+          </p:cNvPr>
+          <p:cNvSpPr txBox="1"/>
+          <p:nvPr/>
         </p:nvSpPr>
-        <p:spPr/>
+        <p:spPr>
+          <a:xfrm>
+            <a:off x="881024" y="3926599"/>
+            <a:ext cx="3566160" cy="646331"/>
+          </a:xfrm>
+          <a:prstGeom prst="rect">
+            <a:avLst/>
+          </a:prstGeom>
+          <a:noFill/>
+        </p:spPr>
         <p:txBody>
-          <a:bodyPr/>
+          <a:bodyPr wrap="square" rtlCol="0">
+            <a:spAutoFit/>
+          </a:bodyPr>
           <a:lstStyle/>
           <a:p>
-            <a:endParaRPr lang="es-AR"/>
+            <a:pPr marL="285750" indent="-285750">
+              <a:buFontTx/>
+              <a:buChar char="-"/>
+            </a:pPr>
+            <a:r>
+              <a:rPr lang="es-ES" dirty="0"/>
+              <a:t>Alimentación de lógica (5V)</a:t>
+            </a:r>
+          </a:p>
+          <a:p>
+            <a:pPr marL="285750" indent="-285750">
+              <a:buFontTx/>
+              <a:buChar char="-"/>
+            </a:pPr>
+            <a:r>
+              <a:rPr lang="es-ES" dirty="0"/>
+              <a:t>Alimentación de motores (6V)</a:t>
+            </a:r>
+            <a:endParaRPr lang="es-AR" dirty="0"/>
           </a:p>
         </p:txBody>
       </p:sp>
     </p:spTree>
     <p:extLst>
       <p:ext uri="{BB962C8B-B14F-4D97-AF65-F5344CB8AC3E}">
-        <p14:creationId xmlns:p14="http://schemas.microsoft.com/office/powerpoint/2010/main" val="4280337898"/>
+        <p14:creationId xmlns:p14="http://schemas.microsoft.com/office/powerpoint/2010/main" val="1525840110"/>
       </p:ext>
     </p:extLst>
   </p:cSld>
@@ -17378,9 +19006,23 @@
 <file path=ppt/slides/slide9.xml><?xml version="1.0" encoding="utf-8"?>
 <p:sld xmlns:a="http://schemas.openxmlformats.org/drawingml/2006/main" xmlns:r="http://schemas.openxmlformats.org/officeDocument/2006/relationships" xmlns:p="http://schemas.openxmlformats.org/presentationml/2006/main">
   <p:cSld>
+    <p:bg>
+      <p:bgPr>
+        <a:solidFill>
+          <a:schemeClr val="bg1"/>
+        </a:solidFill>
+        <a:effectLst/>
+      </p:bgPr>
+    </p:bg>
     <p:spTree>
       <p:nvGrpSpPr>
-        <p:cNvPr id="1" name=""/>
+        <p:cNvPr id="1" name="">
+          <a:extLst>
+            <a:ext uri="{FF2B5EF4-FFF2-40B4-BE49-F238E27FC236}">
+              <a16:creationId xmlns:a16="http://schemas.microsoft.com/office/drawing/2014/main" id="{4A3DF623-86A4-6A97-517E-375B8D23E2A8}"/>
+            </a:ext>
+          </a:extLst>
+        </p:cNvPr>
         <p:cNvGrpSpPr/>
         <p:nvPr/>
       </p:nvGrpSpPr>
@@ -17392,12 +19034,192 @@
           <a:chExt cx="0" cy="0"/>
         </a:xfrm>
       </p:grpSpPr>
+      <p:cxnSp>
+        <p:nvCxnSpPr>
+          <p:cNvPr id="23" name="Straight Connector 22">
+            <a:extLst>
+              <a:ext uri="{FF2B5EF4-FFF2-40B4-BE49-F238E27FC236}">
+                <a16:creationId xmlns:a16="http://schemas.microsoft.com/office/drawing/2014/main" id="{F64F9B95-9045-48D2-B9F3-2927E98F54AA}"/>
+              </a:ext>
+              <a:ext uri="{C183D7F6-B498-43B3-948B-1728B52AA6E4}">
+                <adec:decorative xmlns:adec="http://schemas.microsoft.com/office/drawing/2017/decorative" val="1"/>
+              </a:ext>
+            </a:extLst>
+          </p:cNvPr>
+          <p:cNvCxnSpPr>
+            <a:cxnSpLocks noGrp="1" noRot="1" noChangeAspect="1" noMove="1" noResize="1" noEditPoints="1" noAdjustHandles="1" noChangeArrowheads="1" noChangeShapeType="1"/>
+          </p:cNvCxnSpPr>
+          <p:nvPr>
+            <p:extLst>
+              <p:ext uri="{386F3935-93C4-4BCD-93E2-E3B085C9AB24}">
+                <p16:designElem xmlns:p16="http://schemas.microsoft.com/office/powerpoint/2015/main" val="1"/>
+              </p:ext>
+            </p:extLst>
+          </p:nvPr>
+        </p:nvCxnSpPr>
+        <p:spPr>
+          <a:xfrm>
+            <a:off x="800100" y="723900"/>
+            <a:ext cx="10591800" cy="0"/>
+          </a:xfrm>
+          <a:prstGeom prst="line">
+            <a:avLst/>
+          </a:prstGeom>
+          <a:ln w="44450">
+            <a:solidFill>
+              <a:schemeClr val="tx1"/>
+            </a:solidFill>
+          </a:ln>
+        </p:spPr>
+        <p:style>
+          <a:lnRef idx="1">
+            <a:schemeClr val="accent1"/>
+          </a:lnRef>
+          <a:fillRef idx="0">
+            <a:schemeClr val="accent1"/>
+          </a:fillRef>
+          <a:effectRef idx="0">
+            <a:schemeClr val="accent1"/>
+          </a:effectRef>
+          <a:fontRef idx="minor">
+            <a:schemeClr val="tx1"/>
+          </a:fontRef>
+        </p:style>
+      </p:cxnSp>
+      <p:cxnSp>
+        <p:nvCxnSpPr>
+          <p:cNvPr id="25" name="Straight Connector 24">
+            <a:extLst>
+              <a:ext uri="{FF2B5EF4-FFF2-40B4-BE49-F238E27FC236}">
+                <a16:creationId xmlns:a16="http://schemas.microsoft.com/office/drawing/2014/main" id="{085AA86F-6A4D-4BCB-A045-D992CDC2959B}"/>
+              </a:ext>
+              <a:ext uri="{C183D7F6-B498-43B3-948B-1728B52AA6E4}">
+                <adec:decorative xmlns:adec="http://schemas.microsoft.com/office/drawing/2017/decorative" val="1"/>
+              </a:ext>
+            </a:extLst>
+          </p:cNvPr>
+          <p:cNvCxnSpPr>
+            <a:cxnSpLocks noGrp="1" noRot="1" noChangeAspect="1" noMove="1" noResize="1" noEditPoints="1" noAdjustHandles="1" noChangeArrowheads="1" noChangeShapeType="1"/>
+          </p:cNvCxnSpPr>
+          <p:nvPr>
+            <p:extLst>
+              <p:ext uri="{386F3935-93C4-4BCD-93E2-E3B085C9AB24}">
+                <p16:designElem xmlns:p16="http://schemas.microsoft.com/office/powerpoint/2015/main" val="1"/>
+              </p:ext>
+            </p:extLst>
+          </p:nvPr>
+        </p:nvCxnSpPr>
+        <p:spPr>
+          <a:xfrm>
+            <a:off x="800100" y="6142781"/>
+            <a:ext cx="10591800" cy="0"/>
+          </a:xfrm>
+          <a:prstGeom prst="line">
+            <a:avLst/>
+          </a:prstGeom>
+          <a:ln w="12700">
+            <a:solidFill>
+              <a:schemeClr val="tx1"/>
+            </a:solidFill>
+          </a:ln>
+        </p:spPr>
+        <p:style>
+          <a:lnRef idx="1">
+            <a:schemeClr val="accent1"/>
+          </a:lnRef>
+          <a:fillRef idx="0">
+            <a:schemeClr val="accent1"/>
+          </a:fillRef>
+          <a:effectRef idx="0">
+            <a:schemeClr val="accent1"/>
+          </a:effectRef>
+          <a:fontRef idx="minor">
+            <a:schemeClr val="tx1"/>
+          </a:fontRef>
+        </p:style>
+      </p:cxnSp>
+      <p:sp useBgFill="1">
+        <p:nvSpPr>
+          <p:cNvPr id="27" name="Rectangle 26">
+            <a:extLst>
+              <a:ext uri="{FF2B5EF4-FFF2-40B4-BE49-F238E27FC236}">
+                <a16:creationId xmlns:a16="http://schemas.microsoft.com/office/drawing/2014/main" id="{33E93247-6229-44AB-A550-739E971E690B}"/>
+              </a:ext>
+              <a:ext uri="{C183D7F6-B498-43B3-948B-1728B52AA6E4}">
+                <adec:decorative xmlns:adec="http://schemas.microsoft.com/office/drawing/2017/decorative" val="1"/>
+              </a:ext>
+            </a:extLst>
+          </p:cNvPr>
+          <p:cNvSpPr>
+            <a:spLocks noGrp="1" noRot="1" noChangeAspect="1" noMove="1" noResize="1" noEditPoints="1" noAdjustHandles="1" noChangeArrowheads="1" noChangeShapeType="1" noTextEdit="1"/>
+          </p:cNvSpPr>
+          <p:nvPr>
+            <p:extLst>
+              <p:ext uri="{386F3935-93C4-4BCD-93E2-E3B085C9AB24}">
+                <p16:designElem xmlns:p16="http://schemas.microsoft.com/office/powerpoint/2015/main" val="1"/>
+              </p:ext>
+            </p:extLst>
+          </p:nvPr>
+        </p:nvSpPr>
+        <p:spPr>
+          <a:xfrm>
+            <a:off x="0" y="0"/>
+            <a:ext cx="12192000" cy="6858000"/>
+          </a:xfrm>
+          <a:prstGeom prst="rect">
+            <a:avLst/>
+          </a:prstGeom>
+          <a:ln w="12700" cap="flat" cmpd="sng" algn="ctr">
+            <a:noFill/>
+            <a:prstDash val="solid"/>
+            <a:miter lim="800000"/>
+          </a:ln>
+          <a:effectLst/>
+          <a:extLst>
+            <a:ext uri="{91240B29-F687-4F45-9708-019B960494DF}">
+              <a14:hiddenLine xmlns:a14="http://schemas.microsoft.com/office/drawing/2010/main" w="12700" cap="flat" cmpd="sng" algn="ctr">
+                <a:solidFill>
+                  <a:schemeClr val="accent1">
+                    <a:shade val="50000"/>
+                  </a:schemeClr>
+                </a:solidFill>
+                <a:prstDash val="solid"/>
+                <a:miter lim="800000"/>
+              </a14:hiddenLine>
+            </a:ext>
+          </a:extLst>
+        </p:spPr>
+        <p:style>
+          <a:lnRef idx="2">
+            <a:schemeClr val="accent1">
+              <a:shade val="50000"/>
+            </a:schemeClr>
+          </a:lnRef>
+          <a:fillRef idx="1">
+            <a:schemeClr val="accent1"/>
+          </a:fillRef>
+          <a:effectRef idx="0">
+            <a:schemeClr val="accent1"/>
+          </a:effectRef>
+          <a:fontRef idx="minor">
+            <a:schemeClr val="lt1"/>
+          </a:fontRef>
+        </p:style>
+        <p:txBody>
+          <a:bodyPr rtlCol="0" anchor="ctr"/>
+          <a:lstStyle/>
+          <a:p>
+            <a:pPr algn="ctr"/>
+            <a:endParaRPr lang="en-US"/>
+          </a:p>
+        </p:txBody>
+      </p:sp>
       <p:sp>
         <p:nvSpPr>
           <p:cNvPr id="2" name="Título 1">
             <a:extLst>
               <a:ext uri="{FF2B5EF4-FFF2-40B4-BE49-F238E27FC236}">
-                <a16:creationId xmlns:a16="http://schemas.microsoft.com/office/drawing/2014/main" id="{5ECAB0DF-2F44-A5AF-110E-7C8C99EA2C91}"/>
+                <a16:creationId xmlns:a16="http://schemas.microsoft.com/office/drawing/2014/main" id="{BE65D554-9B53-3392-4DAD-0E70D797B873}"/>
               </a:ext>
             </a:extLst>
           </p:cNvPr>
@@ -17410,34 +19232,118 @@
         </p:nvSpPr>
         <p:spPr>
           <a:xfrm>
-            <a:off x="715383" y="972765"/>
-            <a:ext cx="10632067" cy="1060518"/>
+            <a:off x="7978391" y="1068261"/>
+            <a:ext cx="3490674" cy="2686616"/>
           </a:xfrm>
         </p:spPr>
         <p:txBody>
-          <a:bodyPr/>
+          <a:bodyPr vert="horz" lIns="91440" tIns="45720" rIns="91440" bIns="45720" rtlCol="0" anchor="t">
+            <a:normAutofit/>
+          </a:bodyPr>
           <a:lstStyle/>
           <a:p>
             <a:r>
-              <a:rPr lang="es-AR" dirty="0"/>
-              <a:t>SOFTWARE</a:t>
+              <a:rPr lang="en-US" sz="4200" dirty="0" err="1"/>
+              <a:t>Diagrama</a:t>
+            </a:r>
+            <a:r>
+              <a:rPr lang="en-US" sz="4200" dirty="0"/>
+              <a:t> de </a:t>
+            </a:r>
+            <a:r>
+              <a:rPr lang="en-US" sz="4200" dirty="0" err="1"/>
+              <a:t>conexiones</a:t>
+            </a:r>
+            <a:r>
+              <a:rPr lang="en-US" sz="4200" dirty="0"/>
+              <a:t> del </a:t>
+            </a:r>
+            <a:r>
+              <a:rPr lang="en-US" sz="4200" dirty="0" err="1"/>
+              <a:t>módulo</a:t>
+            </a:r>
+            <a:r>
+              <a:rPr lang="en-US" sz="4200" dirty="0"/>
+              <a:t> </a:t>
+            </a:r>
+            <a:r>
+              <a:rPr lang="en-US" sz="4200" dirty="0" err="1"/>
+              <a:t>deL</a:t>
+            </a:r>
+            <a:r>
+              <a:rPr lang="en-US" sz="4200" dirty="0"/>
+              <a:t> auto</a:t>
             </a:r>
           </a:p>
         </p:txBody>
       </p:sp>
+      <p:cxnSp>
+        <p:nvCxnSpPr>
+          <p:cNvPr id="29" name="Straight Connector 28">
+            <a:extLst>
+              <a:ext uri="{FF2B5EF4-FFF2-40B4-BE49-F238E27FC236}">
+                <a16:creationId xmlns:a16="http://schemas.microsoft.com/office/drawing/2014/main" id="{EE2E603F-4A95-4FE8-BB06-211DFD75DBEF}"/>
+              </a:ext>
+              <a:ext uri="{C183D7F6-B498-43B3-948B-1728B52AA6E4}">
+                <adec:decorative xmlns:adec="http://schemas.microsoft.com/office/drawing/2017/decorative" val="1"/>
+              </a:ext>
+            </a:extLst>
+          </p:cNvPr>
+          <p:cNvCxnSpPr>
+            <a:cxnSpLocks noGrp="1" noRot="1" noChangeAspect="1" noMove="1" noResize="1" noEditPoints="1" noAdjustHandles="1" noChangeArrowheads="1" noChangeShapeType="1"/>
+          </p:cNvCxnSpPr>
+          <p:nvPr>
+            <p:extLst>
+              <p:ext uri="{386F3935-93C4-4BCD-93E2-E3B085C9AB24}">
+                <p16:designElem xmlns:p16="http://schemas.microsoft.com/office/powerpoint/2015/main" val="1"/>
+              </p:ext>
+            </p:extLst>
+          </p:nvPr>
+        </p:nvCxnSpPr>
+        <p:spPr>
+          <a:xfrm>
+            <a:off x="800100" y="723900"/>
+            <a:ext cx="10591800" cy="0"/>
+          </a:xfrm>
+          <a:prstGeom prst="line">
+            <a:avLst/>
+          </a:prstGeom>
+          <a:ln w="44450">
+            <a:solidFill>
+              <a:schemeClr val="tx1"/>
+            </a:solidFill>
+          </a:ln>
+        </p:spPr>
+        <p:style>
+          <a:lnRef idx="1">
+            <a:schemeClr val="accent1"/>
+          </a:lnRef>
+          <a:fillRef idx="0">
+            <a:schemeClr val="accent1"/>
+          </a:fillRef>
+          <a:effectRef idx="0">
+            <a:schemeClr val="accent1"/>
+          </a:effectRef>
+          <a:fontRef idx="minor">
+            <a:schemeClr val="tx1"/>
+          </a:fontRef>
+        </p:style>
+      </p:cxnSp>
       <p:pic>
         <p:nvPicPr>
-          <p:cNvPr id="5" name="Imagen 4" descr="Diagrama&#10;&#10;El contenido generado por IA puede ser incorrecto.">
+          <p:cNvPr id="5" name="Marcador de contenido 4" descr="Diagrama, Esquemático&#10;&#10;El contenido generado por IA puede ser incorrecto.">
             <a:extLst>
               <a:ext uri="{FF2B5EF4-FFF2-40B4-BE49-F238E27FC236}">
-                <a16:creationId xmlns:a16="http://schemas.microsoft.com/office/drawing/2014/main" id="{0EDCAF5A-A859-E5E6-264A-9205D0049E95}"/>
+                <a16:creationId xmlns:a16="http://schemas.microsoft.com/office/drawing/2014/main" id="{86D4A218-4A4F-5700-E013-B3D0CF60C4A8}"/>
               </a:ext>
             </a:extLst>
           </p:cNvPr>
           <p:cNvPicPr>
-            <a:picLocks noChangeAspect="1"/>
+            <a:picLocks noGrp="1" noChangeAspect="1"/>
           </p:cNvPicPr>
-          <p:nvPr/>
+          <p:nvPr>
+            <p:ph idx="1"/>
+          </p:nvPr>
         </p:nvPicPr>
         <p:blipFill>
           <a:blip r:embed="rId2">
@@ -17447,25 +19353,127 @@
               </a:ext>
             </a:extLst>
           </a:blip>
-          <a:srcRect l="11969" t="13168" r="7751" b="12865"/>
+          <a:srcRect l="5285" t="50704" r="1905" b="4256"/>
           <a:stretch>
             <a:fillRect/>
           </a:stretch>
         </p:blipFill>
         <p:spPr>
           <a:xfrm>
-            <a:off x="1920909" y="2207537"/>
-            <a:ext cx="8350181" cy="3677698"/>
+            <a:off x="722935" y="1648685"/>
+            <a:ext cx="7179970" cy="3564590"/>
           </a:xfrm>
           <a:prstGeom prst="rect">
             <a:avLst/>
           </a:prstGeom>
         </p:spPr>
       </p:pic>
+      <p:cxnSp>
+        <p:nvCxnSpPr>
+          <p:cNvPr id="31" name="Straight Connector 30">
+            <a:extLst>
+              <a:ext uri="{FF2B5EF4-FFF2-40B4-BE49-F238E27FC236}">
+                <a16:creationId xmlns:a16="http://schemas.microsoft.com/office/drawing/2014/main" id="{D7CC41EB-2D81-4303-9171-6401B388BA35}"/>
+              </a:ext>
+              <a:ext uri="{C183D7F6-B498-43B3-948B-1728B52AA6E4}">
+                <adec:decorative xmlns:adec="http://schemas.microsoft.com/office/drawing/2017/decorative" val="1"/>
+              </a:ext>
+            </a:extLst>
+          </p:cNvPr>
+          <p:cNvCxnSpPr>
+            <a:cxnSpLocks noGrp="1" noRot="1" noChangeAspect="1" noMove="1" noResize="1" noEditPoints="1" noAdjustHandles="1" noChangeArrowheads="1" noChangeShapeType="1"/>
+          </p:cNvCxnSpPr>
+          <p:nvPr>
+            <p:extLst>
+              <p:ext uri="{386F3935-93C4-4BCD-93E2-E3B085C9AB24}">
+                <p16:designElem xmlns:p16="http://schemas.microsoft.com/office/powerpoint/2015/main" val="1"/>
+              </p:ext>
+            </p:extLst>
+          </p:nvPr>
+        </p:nvCxnSpPr>
+        <p:spPr>
+          <a:xfrm>
+            <a:off x="800100" y="6134885"/>
+            <a:ext cx="10591800" cy="0"/>
+          </a:xfrm>
+          <a:prstGeom prst="line">
+            <a:avLst/>
+          </a:prstGeom>
+          <a:ln w="12700">
+            <a:solidFill>
+              <a:schemeClr val="tx1"/>
+            </a:solidFill>
+          </a:ln>
+        </p:spPr>
+        <p:style>
+          <a:lnRef idx="1">
+            <a:schemeClr val="accent1"/>
+          </a:lnRef>
+          <a:fillRef idx="0">
+            <a:schemeClr val="accent1"/>
+          </a:fillRef>
+          <a:effectRef idx="0">
+            <a:schemeClr val="accent1"/>
+          </a:effectRef>
+          <a:fontRef idx="minor">
+            <a:schemeClr val="tx1"/>
+          </a:fontRef>
+        </p:style>
+      </p:cxnSp>
+      <p:sp>
+        <p:nvSpPr>
+          <p:cNvPr id="3" name="CuadroTexto 2">
+            <a:extLst>
+              <a:ext uri="{FF2B5EF4-FFF2-40B4-BE49-F238E27FC236}">
+                <a16:creationId xmlns:a16="http://schemas.microsoft.com/office/drawing/2014/main" id="{F59276CB-55DE-86BB-A49B-F30D0BE06EBB}"/>
+              </a:ext>
+            </a:extLst>
+          </p:cNvPr>
+          <p:cNvSpPr txBox="1"/>
+          <p:nvPr/>
+        </p:nvSpPr>
+        <p:spPr>
+          <a:xfrm>
+            <a:off x="7902905" y="3928905"/>
+            <a:ext cx="3566160" cy="1200329"/>
+          </a:xfrm>
+          <a:prstGeom prst="rect">
+            <a:avLst/>
+          </a:prstGeom>
+          <a:noFill/>
+        </p:spPr>
+        <p:txBody>
+          <a:bodyPr wrap="square" rtlCol="0">
+            <a:spAutoFit/>
+          </a:bodyPr>
+          <a:lstStyle/>
+          <a:p>
+            <a:pPr marL="285750" indent="-285750">
+              <a:buFontTx/>
+              <a:buChar char="-"/>
+            </a:pPr>
+            <a:r>
+              <a:rPr lang="es-ES" dirty="0"/>
+              <a:t>Conexiones PWM para el control de velocidad</a:t>
+            </a:r>
+          </a:p>
+          <a:p>
+            <a:pPr marL="285750" indent="-285750">
+              <a:buFontTx/>
+              <a:buChar char="-"/>
+            </a:pPr>
+            <a:r>
+              <a:rPr lang="es-ES" dirty="0"/>
+              <a:t>Conexiones de manejo de dirección</a:t>
+            </a:r>
+            <a:endParaRPr lang="es-AR" dirty="0"/>
+          </a:p>
+        </p:txBody>
+      </p:sp>
     </p:spTree>
     <p:extLst>
       <p:ext uri="{BB962C8B-B14F-4D97-AF65-F5344CB8AC3E}">
-        <p14:creationId xmlns:p14="http://schemas.microsoft.com/office/powerpoint/2010/main" val="2841916188"/>
+        <p14:creationId xmlns:p14="http://schemas.microsoft.com/office/powerpoint/2010/main" val="3187397939"/>
       </p:ext>
     </p:extLst>
   </p:cSld>
@@ -18038,6 +20046,14 @@
 </file>
 
 <file path=customXml/item1.xml><?xml version="1.0" encoding="utf-8"?>
+<p:properties xmlns:p="http://schemas.microsoft.com/office/2006/metadata/properties" xmlns:xsi="http://www.w3.org/2001/XMLSchema-instance" xmlns:pc="http://schemas.microsoft.com/office/infopath/2007/PartnerControls">
+  <documentManagement>
+    <_activity xmlns="8fde25c2-1644-44ef-ab59-4bf7219bc5a0" xsi:nil="true"/>
+  </documentManagement>
+</p:properties>
+</file>
+
+<file path=customXml/item2.xml><?xml version="1.0" encoding="utf-8"?>
 <ct:contentTypeSchema xmlns:ct="http://schemas.microsoft.com/office/2006/metadata/contentType" xmlns:ma="http://schemas.microsoft.com/office/2006/metadata/properties/metaAttributes" ct:_="" ma:_="" ma:contentTypeName="Documento" ma:contentTypeID="0x010100346A6C1E0BAACA4BA8F8CF2C8BC6D411" ma:contentTypeVersion="6" ma:contentTypeDescription="Crear nuevo documento." ma:contentTypeScope="" ma:versionID="db2af8e14fe031a73eca40de4fb6033d">
   <xsd:schema xmlns:xsd="http://www.w3.org/2001/XMLSchema" xmlns:xs="http://www.w3.org/2001/XMLSchema" xmlns:p="http://schemas.microsoft.com/office/2006/metadata/properties" xmlns:ns3="8fde25c2-1644-44ef-ab59-4bf7219bc5a0" targetNamespace="http://schemas.microsoft.com/office/2006/metadata/properties" ma:root="true" ma:fieldsID="4b095549a406cc035dd2bcb64d274f19" ns3:_="">
     <xsd:import namespace="8fde25c2-1644-44ef-ab59-4bf7219bc5a0"/>
@@ -18193,7 +20209,7 @@
 </ct:contentTypeSchema>
 </file>
 
-<file path=customXml/item2.xml><?xml version="1.0" encoding="utf-8"?>
+<file path=customXml/item3.xml><?xml version="1.0" encoding="utf-8"?>
 <?mso-contentType ?>
 <FormTemplates xmlns="http://schemas.microsoft.com/sharepoint/v3/contenttype/forms">
   <Display>DocumentLibraryForm</Display>
@@ -18202,15 +20218,23 @@
 </FormTemplates>
 </file>
 
-<file path=customXml/item3.xml><?xml version="1.0" encoding="utf-8"?>
-<p:properties xmlns:p="http://schemas.microsoft.com/office/2006/metadata/properties" xmlns:xsi="http://www.w3.org/2001/XMLSchema-instance" xmlns:pc="http://schemas.microsoft.com/office/infopath/2007/PartnerControls">
-  <documentManagement>
-    <_activity xmlns="8fde25c2-1644-44ef-ab59-4bf7219bc5a0" xsi:nil="true"/>
-  </documentManagement>
-</p:properties>
+<file path=customXml/itemProps1.xml><?xml version="1.0" encoding="utf-8"?>
+<ds:datastoreItem xmlns:ds="http://schemas.openxmlformats.org/officeDocument/2006/customXml" ds:itemID="{09767C18-1834-4504-9935-24A2E0F2A096}">
+  <ds:schemaRefs>
+    <ds:schemaRef ds:uri="http://purl.org/dc/dcmitype/"/>
+    <ds:schemaRef ds:uri="8fde25c2-1644-44ef-ab59-4bf7219bc5a0"/>
+    <ds:schemaRef ds:uri="http://schemas.openxmlformats.org/package/2006/metadata/core-properties"/>
+    <ds:schemaRef ds:uri="http://purl.org/dc/elements/1.1/"/>
+    <ds:schemaRef ds:uri="http://schemas.microsoft.com/office/2006/documentManagement/types"/>
+    <ds:schemaRef ds:uri="http://schemas.microsoft.com/office/2006/metadata/properties"/>
+    <ds:schemaRef ds:uri="http://schemas.microsoft.com/office/infopath/2007/PartnerControls"/>
+    <ds:schemaRef ds:uri="http://www.w3.org/XML/1998/namespace"/>
+    <ds:schemaRef ds:uri="http://purl.org/dc/terms/"/>
+  </ds:schemaRefs>
+</ds:datastoreItem>
 </file>
 
-<file path=customXml/itemProps1.xml><?xml version="1.0" encoding="utf-8"?>
+<file path=customXml/itemProps2.xml><?xml version="1.0" encoding="utf-8"?>
 <ds:datastoreItem xmlns:ds="http://schemas.openxmlformats.org/officeDocument/2006/customXml" ds:itemID="{68B96894-D9A8-4B41-94BB-398D740C79EA}">
   <ds:schemaRefs>
     <ds:schemaRef ds:uri="http://schemas.microsoft.com/office/2006/metadata/contentType"/>
@@ -18228,26 +20252,10 @@
 </ds:datastoreItem>
 </file>
 
-<file path=customXml/itemProps2.xml><?xml version="1.0" encoding="utf-8"?>
+<file path=customXml/itemProps3.xml><?xml version="1.0" encoding="utf-8"?>
 <ds:datastoreItem xmlns:ds="http://schemas.openxmlformats.org/officeDocument/2006/customXml" ds:itemID="{BF12540E-6921-427B-9EBA-79E5F711F853}">
   <ds:schemaRefs>
     <ds:schemaRef ds:uri="http://schemas.microsoft.com/sharepoint/v3/contenttype/forms"/>
   </ds:schemaRefs>
 </ds:datastoreItem>
-</file>
-
-<file path=customXml/itemProps3.xml><?xml version="1.0" encoding="utf-8"?>
-<ds:datastoreItem xmlns:ds="http://schemas.openxmlformats.org/officeDocument/2006/customXml" ds:itemID="{09767C18-1834-4504-9935-24A2E0F2A096}">
-  <ds:schemaRefs>
-    <ds:schemaRef ds:uri="http://purl.org/dc/dcmitype/"/>
-    <ds:schemaRef ds:uri="8fde25c2-1644-44ef-ab59-4bf7219bc5a0"/>
-    <ds:schemaRef ds:uri="http://schemas.openxmlformats.org/package/2006/metadata/core-properties"/>
-    <ds:schemaRef ds:uri="http://purl.org/dc/elements/1.1/"/>
-    <ds:schemaRef ds:uri="http://schemas.microsoft.com/office/2006/documentManagement/types"/>
-    <ds:schemaRef ds:uri="http://schemas.microsoft.com/office/2006/metadata/properties"/>
-    <ds:schemaRef ds:uri="http://schemas.microsoft.com/office/infopath/2007/PartnerControls"/>
-    <ds:schemaRef ds:uri="http://www.w3.org/XML/1998/namespace"/>
-    <ds:schemaRef ds:uri="http://purl.org/dc/terms/"/>
-  </ds:schemaRefs>
-</ds:datastoreItem>
 </file>